--- a/media/module8/slides.pptx
+++ b/media/module8/slides.pptx
@@ -95,6 +95,26 @@
     <p:sldId id="343" r:id="rId95"/>
     <p:sldId id="344" r:id="rId96"/>
     <p:sldId id="345" r:id="rId97"/>
+    <p:sldId id="346" r:id="rId98"/>
+    <p:sldId id="347" r:id="rId99"/>
+    <p:sldId id="348" r:id="rId100"/>
+    <p:sldId id="349" r:id="rId101"/>
+    <p:sldId id="350" r:id="rId102"/>
+    <p:sldId id="351" r:id="rId103"/>
+    <p:sldId id="352" r:id="rId104"/>
+    <p:sldId id="353" r:id="rId105"/>
+    <p:sldId id="354" r:id="rId106"/>
+    <p:sldId id="355" r:id="rId107"/>
+    <p:sldId id="356" r:id="rId108"/>
+    <p:sldId id="357" r:id="rId109"/>
+    <p:sldId id="358" r:id="rId110"/>
+    <p:sldId id="359" r:id="rId111"/>
+    <p:sldId id="360" r:id="rId112"/>
+    <p:sldId id="361" r:id="rId113"/>
+    <p:sldId id="362" r:id="rId114"/>
+    <p:sldId id="363" r:id="rId115"/>
+    <p:sldId id="364" r:id="rId116"/>
+    <p:sldId id="365" r:id="rId117"/>
   </p:sldIdLst>
   <p:sldSz cx="12191695" cy="6858000" type="screen4x3"/>
   <p:notesSz cx="6858000" cy="9144000"/>
@@ -5866,6 +5886,76 @@
 </p:notes>
 </file>
 
+<file path=ppt/notesSlides/notesSlide79.xml><?xml version="1.0" encoding="utf-8"?>
+<p:notes xmlns:a="http://schemas.openxmlformats.org/drawingml/2006/main" xmlns:p="http://schemas.openxmlformats.org/presentationml/2006/main" xmlns:r="http://schemas.openxmlformats.org/officeDocument/2006/relationships">
+  <p:cSld>
+    <p:spTree>
+      <p:nvGrpSpPr>
+        <p:cNvPr id="1" name=""/>
+        <p:cNvGrpSpPr/>
+        <p:nvPr/>
+      </p:nvGrpSpPr>
+      <p:grpSpPr>
+        <a:xfrm>
+          <a:off x="0" y="0"/>
+          <a:ext cx="0" cy="0"/>
+          <a:chOff x="0" y="0"/>
+          <a:chExt cx="0" cy="0"/>
+        </a:xfrm>
+      </p:grpSpPr>
+      <p:sp>
+        <p:nvSpPr>
+          <p:cNvPr id="2" name="Slide Image Placeholder 1"/>
+          <p:cNvSpPr>
+            <a:spLocks noGrp="1"/>
+          </p:cNvSpPr>
+          <p:nvPr>
+            <p:ph type="sldImg" idx="2"/>
+          </p:nvPr>
+        </p:nvSpPr>
+        <p:spPr/>
+      </p:sp>
+      <p:sp>
+        <p:nvSpPr>
+          <p:cNvPr id="3" name="Notes Placeholder 2"/>
+          <p:cNvSpPr>
+            <a:spLocks noGrp="1"/>
+          </p:cNvSpPr>
+          <p:nvPr>
+            <p:ph type="body" idx="3" sz="quarter"/>
+          </p:nvPr>
+        </p:nvSpPr>
+        <p:spPr/>
+        <p:txBody>
+          <a:bodyPr/>
+          <a:lstStyle/>
+          <a:p>
+            <a:r>
+              <a:t>module8/examples/clp/README.md</a:t>
+            </a:r>
+          </a:p>
+        </p:txBody>
+      </p:sp>
+      <p:sp>
+        <p:nvSpPr>
+          <p:cNvPr id="4" name="Slide Number Placeholder 3"/>
+          <p:cNvSpPr>
+            <a:spLocks noGrp="1"/>
+          </p:cNvSpPr>
+          <p:nvPr>
+            <p:ph type="sldNum" idx="5" sz="quarter"/>
+          </p:nvPr>
+        </p:nvSpPr>
+        <p:spPr/>
+      </p:sp>
+    </p:spTree>
+  </p:cSld>
+  <p:clrMapOvr>
+    <a:masterClrMapping/>
+  </p:clrMapOvr>
+</p:notes>
+</file>
+
 <file path=ppt/notesSlides/notesSlide8.xml><?xml version="1.0" encoding="utf-8"?>
 <p:notes xmlns:a="http://schemas.openxmlformats.org/drawingml/2006/main" xmlns:p="http://schemas.openxmlformats.org/presentationml/2006/main" xmlns:r="http://schemas.openxmlformats.org/officeDocument/2006/relationships">
   <p:cSld>
@@ -5912,6 +6002,706 @@
           <a:p>
             <a:r>
               <a:t>From MODULE8 Topics Covered.</a:t>
+            </a:r>
+          </a:p>
+        </p:txBody>
+      </p:sp>
+      <p:sp>
+        <p:nvSpPr>
+          <p:cNvPr id="4" name="Slide Number Placeholder 3"/>
+          <p:cNvSpPr>
+            <a:spLocks noGrp="1"/>
+          </p:cNvSpPr>
+          <p:nvPr>
+            <p:ph type="sldNum" idx="5" sz="quarter"/>
+          </p:nvPr>
+        </p:nvSpPr>
+        <p:spPr/>
+      </p:sp>
+    </p:spTree>
+  </p:cSld>
+  <p:clrMapOvr>
+    <a:masterClrMapping/>
+  </p:clrMapOvr>
+</p:notes>
+</file>
+
+<file path=ppt/notesSlides/notesSlide80.xml><?xml version="1.0" encoding="utf-8"?>
+<p:notes xmlns:a="http://schemas.openxmlformats.org/drawingml/2006/main" xmlns:p="http://schemas.openxmlformats.org/presentationml/2006/main" xmlns:r="http://schemas.openxmlformats.org/officeDocument/2006/relationships">
+  <p:cSld>
+    <p:spTree>
+      <p:nvGrpSpPr>
+        <p:cNvPr id="1" name=""/>
+        <p:cNvGrpSpPr/>
+        <p:nvPr/>
+      </p:nvGrpSpPr>
+      <p:grpSpPr>
+        <a:xfrm>
+          <a:off x="0" y="0"/>
+          <a:ext cx="0" cy="0"/>
+          <a:chOff x="0" y="0"/>
+          <a:chExt cx="0" cy="0"/>
+        </a:xfrm>
+      </p:grpSpPr>
+      <p:sp>
+        <p:nvSpPr>
+          <p:cNvPr id="2" name="Slide Image Placeholder 1"/>
+          <p:cNvSpPr>
+            <a:spLocks noGrp="1"/>
+          </p:cNvSpPr>
+          <p:nvPr>
+            <p:ph type="sldImg" idx="2"/>
+          </p:nvPr>
+        </p:nvSpPr>
+        <p:spPr/>
+      </p:sp>
+      <p:sp>
+        <p:nvSpPr>
+          <p:cNvPr id="3" name="Notes Placeholder 2"/>
+          <p:cNvSpPr>
+            <a:spLocks noGrp="1"/>
+          </p:cNvSpPr>
+          <p:nvPr>
+            <p:ph type="body" idx="3" sz="quarter"/>
+          </p:nvPr>
+        </p:nvSpPr>
+        <p:spPr/>
+        <p:txBody>
+          <a:bodyPr/>
+          <a:lstStyle/>
+          <a:p>
+            <a:r>
+              <a:t>Hands-on: module8/examples/clp/</a:t>
+            </a:r>
+          </a:p>
+        </p:txBody>
+      </p:sp>
+      <p:sp>
+        <p:nvSpPr>
+          <p:cNvPr id="4" name="Slide Number Placeholder 3"/>
+          <p:cNvSpPr>
+            <a:spLocks noGrp="1"/>
+          </p:cNvSpPr>
+          <p:nvPr>
+            <p:ph type="sldNum" idx="5" sz="quarter"/>
+          </p:nvPr>
+        </p:nvSpPr>
+        <p:spPr/>
+      </p:sp>
+    </p:spTree>
+  </p:cSld>
+  <p:clrMapOvr>
+    <a:masterClrMapping/>
+  </p:clrMapOvr>
+</p:notes>
+</file>
+
+<file path=ppt/notesSlides/notesSlide81.xml><?xml version="1.0" encoding="utf-8"?>
+<p:notes xmlns:a="http://schemas.openxmlformats.org/drawingml/2006/main" xmlns:p="http://schemas.openxmlformats.org/presentationml/2006/main" xmlns:r="http://schemas.openxmlformats.org/officeDocument/2006/relationships">
+  <p:cSld>
+    <p:spTree>
+      <p:nvGrpSpPr>
+        <p:cNvPr id="1" name=""/>
+        <p:cNvGrpSpPr/>
+        <p:nvPr/>
+      </p:nvGrpSpPr>
+      <p:grpSpPr>
+        <a:xfrm>
+          <a:off x="0" y="0"/>
+          <a:ext cx="0" cy="0"/>
+          <a:chOff x="0" y="0"/>
+          <a:chExt cx="0" cy="0"/>
+        </a:xfrm>
+      </p:grpSpPr>
+      <p:sp>
+        <p:nvSpPr>
+          <p:cNvPr id="2" name="Slide Image Placeholder 1"/>
+          <p:cNvSpPr>
+            <a:spLocks noGrp="1"/>
+          </p:cNvSpPr>
+          <p:nvPr>
+            <p:ph type="sldImg" idx="2"/>
+          </p:nvPr>
+        </p:nvSpPr>
+        <p:spPr/>
+      </p:sp>
+      <p:sp>
+        <p:nvSpPr>
+          <p:cNvPr id="3" name="Notes Placeholder 2"/>
+          <p:cNvSpPr>
+            <a:spLocks noGrp="1"/>
+          </p:cNvSpPr>
+          <p:nvPr>
+            <p:ph type="body" idx="3" sz="quarter"/>
+          </p:nvPr>
+        </p:nvSpPr>
+        <p:spPr/>
+        <p:txBody>
+          <a:bodyPr/>
+          <a:lstStyle/>
+          <a:p>
+            <a:r>
+              <a:t>module8/examples/comparators/README.md</a:t>
+            </a:r>
+          </a:p>
+        </p:txBody>
+      </p:sp>
+      <p:sp>
+        <p:nvSpPr>
+          <p:cNvPr id="4" name="Slide Number Placeholder 3"/>
+          <p:cNvSpPr>
+            <a:spLocks noGrp="1"/>
+          </p:cNvSpPr>
+          <p:nvPr>
+            <p:ph type="sldNum" idx="5" sz="quarter"/>
+          </p:nvPr>
+        </p:nvSpPr>
+        <p:spPr/>
+      </p:sp>
+    </p:spTree>
+  </p:cSld>
+  <p:clrMapOvr>
+    <a:masterClrMapping/>
+  </p:clrMapOvr>
+</p:notes>
+</file>
+
+<file path=ppt/notesSlides/notesSlide82.xml><?xml version="1.0" encoding="utf-8"?>
+<p:notes xmlns:a="http://schemas.openxmlformats.org/drawingml/2006/main" xmlns:p="http://schemas.openxmlformats.org/presentationml/2006/main" xmlns:r="http://schemas.openxmlformats.org/officeDocument/2006/relationships">
+  <p:cSld>
+    <p:spTree>
+      <p:nvGrpSpPr>
+        <p:cNvPr id="1" name=""/>
+        <p:cNvGrpSpPr/>
+        <p:nvPr/>
+      </p:nvGrpSpPr>
+      <p:grpSpPr>
+        <a:xfrm>
+          <a:off x="0" y="0"/>
+          <a:ext cx="0" cy="0"/>
+          <a:chOff x="0" y="0"/>
+          <a:chExt cx="0" cy="0"/>
+        </a:xfrm>
+      </p:grpSpPr>
+      <p:sp>
+        <p:nvSpPr>
+          <p:cNvPr id="2" name="Slide Image Placeholder 1"/>
+          <p:cNvSpPr>
+            <a:spLocks noGrp="1"/>
+          </p:cNvSpPr>
+          <p:nvPr>
+            <p:ph type="sldImg" idx="2"/>
+          </p:nvPr>
+        </p:nvSpPr>
+        <p:spPr/>
+      </p:sp>
+      <p:sp>
+        <p:nvSpPr>
+          <p:cNvPr id="3" name="Notes Placeholder 2"/>
+          <p:cNvSpPr>
+            <a:spLocks noGrp="1"/>
+          </p:cNvSpPr>
+          <p:nvPr>
+            <p:ph type="body" idx="3" sz="quarter"/>
+          </p:nvPr>
+        </p:nvSpPr>
+        <p:spPr/>
+        <p:txBody>
+          <a:bodyPr/>
+          <a:lstStyle/>
+          <a:p>
+            <a:r>
+              <a:t>Hands-on: module8/examples/comparators/</a:t>
+            </a:r>
+          </a:p>
+        </p:txBody>
+      </p:sp>
+      <p:sp>
+        <p:nvSpPr>
+          <p:cNvPr id="4" name="Slide Number Placeholder 3"/>
+          <p:cNvSpPr>
+            <a:spLocks noGrp="1"/>
+          </p:cNvSpPr>
+          <p:nvPr>
+            <p:ph type="sldNum" idx="5" sz="quarter"/>
+          </p:nvPr>
+        </p:nvSpPr>
+        <p:spPr/>
+      </p:sp>
+    </p:spTree>
+  </p:cSld>
+  <p:clrMapOvr>
+    <a:masterClrMapping/>
+  </p:clrMapOvr>
+</p:notes>
+</file>
+
+<file path=ppt/notesSlides/notesSlide83.xml><?xml version="1.0" encoding="utf-8"?>
+<p:notes xmlns:a="http://schemas.openxmlformats.org/drawingml/2006/main" xmlns:p="http://schemas.openxmlformats.org/presentationml/2006/main" xmlns:r="http://schemas.openxmlformats.org/officeDocument/2006/relationships">
+  <p:cSld>
+    <p:spTree>
+      <p:nvGrpSpPr>
+        <p:cNvPr id="1" name=""/>
+        <p:cNvGrpSpPr/>
+        <p:nvPr/>
+      </p:nvGrpSpPr>
+      <p:grpSpPr>
+        <a:xfrm>
+          <a:off x="0" y="0"/>
+          <a:ext cx="0" cy="0"/>
+          <a:chOff x="0" y="0"/>
+          <a:chExt cx="0" cy="0"/>
+        </a:xfrm>
+      </p:grpSpPr>
+      <p:sp>
+        <p:nvSpPr>
+          <p:cNvPr id="2" name="Slide Image Placeholder 1"/>
+          <p:cNvSpPr>
+            <a:spLocks noGrp="1"/>
+          </p:cNvSpPr>
+          <p:nvPr>
+            <p:ph type="sldImg" idx="2"/>
+          </p:nvPr>
+        </p:nvSpPr>
+        <p:spPr/>
+      </p:sp>
+      <p:sp>
+        <p:nvSpPr>
+          <p:cNvPr id="3" name="Notes Placeholder 2"/>
+          <p:cNvSpPr>
+            <a:spLocks noGrp="1"/>
+          </p:cNvSpPr>
+          <p:nvPr>
+            <p:ph type="body" idx="3" sz="quarter"/>
+          </p:nvPr>
+        </p:nvSpPr>
+        <p:spPr/>
+        <p:txBody>
+          <a:bodyPr/>
+          <a:lstStyle/>
+          <a:p>
+            <a:r>
+              <a:t>module8/examples/recorders/README.md</a:t>
+            </a:r>
+          </a:p>
+        </p:txBody>
+      </p:sp>
+      <p:sp>
+        <p:nvSpPr>
+          <p:cNvPr id="4" name="Slide Number Placeholder 3"/>
+          <p:cNvSpPr>
+            <a:spLocks noGrp="1"/>
+          </p:cNvSpPr>
+          <p:nvPr>
+            <p:ph type="sldNum" idx="5" sz="quarter"/>
+          </p:nvPr>
+        </p:nvSpPr>
+        <p:spPr/>
+      </p:sp>
+    </p:spTree>
+  </p:cSld>
+  <p:clrMapOvr>
+    <a:masterClrMapping/>
+  </p:clrMapOvr>
+</p:notes>
+</file>
+
+<file path=ppt/notesSlides/notesSlide84.xml><?xml version="1.0" encoding="utf-8"?>
+<p:notes xmlns:a="http://schemas.openxmlformats.org/drawingml/2006/main" xmlns:p="http://schemas.openxmlformats.org/presentationml/2006/main" xmlns:r="http://schemas.openxmlformats.org/officeDocument/2006/relationships">
+  <p:cSld>
+    <p:spTree>
+      <p:nvGrpSpPr>
+        <p:cNvPr id="1" name=""/>
+        <p:cNvGrpSpPr/>
+        <p:nvPr/>
+      </p:nvGrpSpPr>
+      <p:grpSpPr>
+        <a:xfrm>
+          <a:off x="0" y="0"/>
+          <a:ext cx="0" cy="0"/>
+          <a:chOff x="0" y="0"/>
+          <a:chExt cx="0" cy="0"/>
+        </a:xfrm>
+      </p:grpSpPr>
+      <p:sp>
+        <p:nvSpPr>
+          <p:cNvPr id="2" name="Slide Image Placeholder 1"/>
+          <p:cNvSpPr>
+            <a:spLocks noGrp="1"/>
+          </p:cNvSpPr>
+          <p:nvPr>
+            <p:ph type="sldImg" idx="2"/>
+          </p:nvPr>
+        </p:nvSpPr>
+        <p:spPr/>
+      </p:sp>
+      <p:sp>
+        <p:nvSpPr>
+          <p:cNvPr id="3" name="Notes Placeholder 2"/>
+          <p:cNvSpPr>
+            <a:spLocks noGrp="1"/>
+          </p:cNvSpPr>
+          <p:nvPr>
+            <p:ph type="body" idx="3" sz="quarter"/>
+          </p:nvPr>
+        </p:nvSpPr>
+        <p:spPr/>
+        <p:txBody>
+          <a:bodyPr/>
+          <a:lstStyle/>
+          <a:p>
+            <a:r>
+              <a:t>Hands-on: module8/examples/recorders/</a:t>
+            </a:r>
+          </a:p>
+        </p:txBody>
+      </p:sp>
+      <p:sp>
+        <p:nvSpPr>
+          <p:cNvPr id="4" name="Slide Number Placeholder 3"/>
+          <p:cNvSpPr>
+            <a:spLocks noGrp="1"/>
+          </p:cNvSpPr>
+          <p:nvPr>
+            <p:ph type="sldNum" idx="5" sz="quarter"/>
+          </p:nvPr>
+        </p:nvSpPr>
+        <p:spPr/>
+      </p:sp>
+    </p:spTree>
+  </p:cSld>
+  <p:clrMapOvr>
+    <a:masterClrMapping/>
+  </p:clrMapOvr>
+</p:notes>
+</file>
+
+<file path=ppt/notesSlides/notesSlide85.xml><?xml version="1.0" encoding="utf-8"?>
+<p:notes xmlns:a="http://schemas.openxmlformats.org/drawingml/2006/main" xmlns:p="http://schemas.openxmlformats.org/presentationml/2006/main" xmlns:r="http://schemas.openxmlformats.org/officeDocument/2006/relationships">
+  <p:cSld>
+    <p:spTree>
+      <p:nvGrpSpPr>
+        <p:cNvPr id="1" name=""/>
+        <p:cNvGrpSpPr/>
+        <p:nvPr/>
+      </p:nvGrpSpPr>
+      <p:grpSpPr>
+        <a:xfrm>
+          <a:off x="0" y="0"/>
+          <a:ext cx="0" cy="0"/>
+          <a:chOff x="0" y="0"/>
+          <a:chExt cx="0" cy="0"/>
+        </a:xfrm>
+      </p:grpSpPr>
+      <p:sp>
+        <p:nvSpPr>
+          <p:cNvPr id="2" name="Slide Image Placeholder 1"/>
+          <p:cNvSpPr>
+            <a:spLocks noGrp="1"/>
+          </p:cNvSpPr>
+          <p:nvPr>
+            <p:ph type="sldImg" idx="2"/>
+          </p:nvPr>
+        </p:nvSpPr>
+        <p:spPr/>
+      </p:sp>
+      <p:sp>
+        <p:nvSpPr>
+          <p:cNvPr id="3" name="Notes Placeholder 2"/>
+          <p:cNvSpPr>
+            <a:spLocks noGrp="1"/>
+          </p:cNvSpPr>
+          <p:nvPr>
+            <p:ph type="body" idx="3" sz="quarter"/>
+          </p:nvPr>
+        </p:nvSpPr>
+        <p:spPr/>
+        <p:txBody>
+          <a:bodyPr/>
+          <a:lstStyle/>
+          <a:p>
+            <a:r>
+              <a:t>module8/examples/pools/README.md</a:t>
+            </a:r>
+          </a:p>
+        </p:txBody>
+      </p:sp>
+      <p:sp>
+        <p:nvSpPr>
+          <p:cNvPr id="4" name="Slide Number Placeholder 3"/>
+          <p:cNvSpPr>
+            <a:spLocks noGrp="1"/>
+          </p:cNvSpPr>
+          <p:nvPr>
+            <p:ph type="sldNum" idx="5" sz="quarter"/>
+          </p:nvPr>
+        </p:nvSpPr>
+        <p:spPr/>
+      </p:sp>
+    </p:spTree>
+  </p:cSld>
+  <p:clrMapOvr>
+    <a:masterClrMapping/>
+  </p:clrMapOvr>
+</p:notes>
+</file>
+
+<file path=ppt/notesSlides/notesSlide86.xml><?xml version="1.0" encoding="utf-8"?>
+<p:notes xmlns:a="http://schemas.openxmlformats.org/drawingml/2006/main" xmlns:p="http://schemas.openxmlformats.org/presentationml/2006/main" xmlns:r="http://schemas.openxmlformats.org/officeDocument/2006/relationships">
+  <p:cSld>
+    <p:spTree>
+      <p:nvGrpSpPr>
+        <p:cNvPr id="1" name=""/>
+        <p:cNvGrpSpPr/>
+        <p:nvPr/>
+      </p:nvGrpSpPr>
+      <p:grpSpPr>
+        <a:xfrm>
+          <a:off x="0" y="0"/>
+          <a:ext cx="0" cy="0"/>
+          <a:chOff x="0" y="0"/>
+          <a:chExt cx="0" cy="0"/>
+        </a:xfrm>
+      </p:grpSpPr>
+      <p:sp>
+        <p:nvSpPr>
+          <p:cNvPr id="2" name="Slide Image Placeholder 1"/>
+          <p:cNvSpPr>
+            <a:spLocks noGrp="1"/>
+          </p:cNvSpPr>
+          <p:nvPr>
+            <p:ph type="sldImg" idx="2"/>
+          </p:nvPr>
+        </p:nvSpPr>
+        <p:spPr/>
+      </p:sp>
+      <p:sp>
+        <p:nvSpPr>
+          <p:cNvPr id="3" name="Notes Placeholder 2"/>
+          <p:cNvSpPr>
+            <a:spLocks noGrp="1"/>
+          </p:cNvSpPr>
+          <p:nvPr>
+            <p:ph type="body" idx="3" sz="quarter"/>
+          </p:nvPr>
+        </p:nvSpPr>
+        <p:spPr/>
+        <p:txBody>
+          <a:bodyPr/>
+          <a:lstStyle/>
+          <a:p>
+            <a:r>
+              <a:t>Hands-on: module8/examples/pools/</a:t>
+            </a:r>
+          </a:p>
+        </p:txBody>
+      </p:sp>
+      <p:sp>
+        <p:nvSpPr>
+          <p:cNvPr id="4" name="Slide Number Placeholder 3"/>
+          <p:cNvSpPr>
+            <a:spLocks noGrp="1"/>
+          </p:cNvSpPr>
+          <p:nvPr>
+            <p:ph type="sldNum" idx="5" sz="quarter"/>
+          </p:nvPr>
+        </p:nvSpPr>
+        <p:spPr/>
+      </p:sp>
+    </p:spTree>
+  </p:cSld>
+  <p:clrMapOvr>
+    <a:masterClrMapping/>
+  </p:clrMapOvr>
+</p:notes>
+</file>
+
+<file path=ppt/notesSlides/notesSlide87.xml><?xml version="1.0" encoding="utf-8"?>
+<p:notes xmlns:a="http://schemas.openxmlformats.org/drawingml/2006/main" xmlns:p="http://schemas.openxmlformats.org/presentationml/2006/main" xmlns:r="http://schemas.openxmlformats.org/officeDocument/2006/relationships">
+  <p:cSld>
+    <p:spTree>
+      <p:nvGrpSpPr>
+        <p:cNvPr id="1" name=""/>
+        <p:cNvGrpSpPr/>
+        <p:nvPr/>
+      </p:nvGrpSpPr>
+      <p:grpSpPr>
+        <a:xfrm>
+          <a:off x="0" y="0"/>
+          <a:ext cx="0" cy="0"/>
+          <a:chOff x="0" y="0"/>
+          <a:chExt cx="0" cy="0"/>
+        </a:xfrm>
+      </p:grpSpPr>
+      <p:sp>
+        <p:nvSpPr>
+          <p:cNvPr id="2" name="Slide Image Placeholder 1"/>
+          <p:cNvSpPr>
+            <a:spLocks noGrp="1"/>
+          </p:cNvSpPr>
+          <p:nvPr>
+            <p:ph type="sldImg" idx="2"/>
+          </p:nvPr>
+        </p:nvSpPr>
+        <p:spPr/>
+      </p:sp>
+      <p:sp>
+        <p:nvSpPr>
+          <p:cNvPr id="3" name="Notes Placeholder 2"/>
+          <p:cNvSpPr>
+            <a:spLocks noGrp="1"/>
+          </p:cNvSpPr>
+          <p:nvPr>
+            <p:ph type="body" idx="3" sz="quarter"/>
+          </p:nvPr>
+        </p:nvSpPr>
+        <p:spPr/>
+        <p:txBody>
+          <a:bodyPr/>
+          <a:lstStyle/>
+          <a:p>
+            <a:r>
+              <a:t>module8/examples/queues/README.md</a:t>
+            </a:r>
+          </a:p>
+        </p:txBody>
+      </p:sp>
+      <p:sp>
+        <p:nvSpPr>
+          <p:cNvPr id="4" name="Slide Number Placeholder 3"/>
+          <p:cNvSpPr>
+            <a:spLocks noGrp="1"/>
+          </p:cNvSpPr>
+          <p:nvPr>
+            <p:ph type="sldNum" idx="5" sz="quarter"/>
+          </p:nvPr>
+        </p:nvSpPr>
+        <p:spPr/>
+      </p:sp>
+    </p:spTree>
+  </p:cSld>
+  <p:clrMapOvr>
+    <a:masterClrMapping/>
+  </p:clrMapOvr>
+</p:notes>
+</file>
+
+<file path=ppt/notesSlides/notesSlide88.xml><?xml version="1.0" encoding="utf-8"?>
+<p:notes xmlns:a="http://schemas.openxmlformats.org/drawingml/2006/main" xmlns:p="http://schemas.openxmlformats.org/presentationml/2006/main" xmlns:r="http://schemas.openxmlformats.org/officeDocument/2006/relationships">
+  <p:cSld>
+    <p:spTree>
+      <p:nvGrpSpPr>
+        <p:cNvPr id="1" name=""/>
+        <p:cNvGrpSpPr/>
+        <p:nvPr/>
+      </p:nvGrpSpPr>
+      <p:grpSpPr>
+        <a:xfrm>
+          <a:off x="0" y="0"/>
+          <a:ext cx="0" cy="0"/>
+          <a:chOff x="0" y="0"/>
+          <a:chExt cx="0" cy="0"/>
+        </a:xfrm>
+      </p:grpSpPr>
+      <p:sp>
+        <p:nvSpPr>
+          <p:cNvPr id="2" name="Slide Image Placeholder 1"/>
+          <p:cNvSpPr>
+            <a:spLocks noGrp="1"/>
+          </p:cNvSpPr>
+          <p:nvPr>
+            <p:ph type="sldImg" idx="2"/>
+          </p:nvPr>
+        </p:nvSpPr>
+        <p:spPr/>
+      </p:sp>
+      <p:sp>
+        <p:nvSpPr>
+          <p:cNvPr id="3" name="Notes Placeholder 2"/>
+          <p:cNvSpPr>
+            <a:spLocks noGrp="1"/>
+          </p:cNvSpPr>
+          <p:nvPr>
+            <p:ph type="body" idx="3" sz="quarter"/>
+          </p:nvPr>
+        </p:nvSpPr>
+        <p:spPr/>
+        <p:txBody>
+          <a:bodyPr/>
+          <a:lstStyle/>
+          <a:p>
+            <a:r>
+              <a:t>Hands-on: module8/examples/queues/</a:t>
+            </a:r>
+          </a:p>
+        </p:txBody>
+      </p:sp>
+      <p:sp>
+        <p:nvSpPr>
+          <p:cNvPr id="4" name="Slide Number Placeholder 3"/>
+          <p:cNvSpPr>
+            <a:spLocks noGrp="1"/>
+          </p:cNvSpPr>
+          <p:nvPr>
+            <p:ph type="sldNum" idx="5" sz="quarter"/>
+          </p:nvPr>
+        </p:nvSpPr>
+        <p:spPr/>
+      </p:sp>
+    </p:spTree>
+  </p:cSld>
+  <p:clrMapOvr>
+    <a:masterClrMapping/>
+  </p:clrMapOvr>
+</p:notes>
+</file>
+
+<file path=ppt/notesSlides/notesSlide89.xml><?xml version="1.0" encoding="utf-8"?>
+<p:notes xmlns:a="http://schemas.openxmlformats.org/drawingml/2006/main" xmlns:p="http://schemas.openxmlformats.org/presentationml/2006/main" xmlns:r="http://schemas.openxmlformats.org/officeDocument/2006/relationships">
+  <p:cSld>
+    <p:spTree>
+      <p:nvGrpSpPr>
+        <p:cNvPr id="1" name=""/>
+        <p:cNvGrpSpPr/>
+        <p:nvPr/>
+      </p:nvGrpSpPr>
+      <p:grpSpPr>
+        <a:xfrm>
+          <a:off x="0" y="0"/>
+          <a:ext cx="0" cy="0"/>
+          <a:chOff x="0" y="0"/>
+          <a:chExt cx="0" cy="0"/>
+        </a:xfrm>
+      </p:grpSpPr>
+      <p:sp>
+        <p:nvSpPr>
+          <p:cNvPr id="2" name="Slide Image Placeholder 1"/>
+          <p:cNvSpPr>
+            <a:spLocks noGrp="1"/>
+          </p:cNvSpPr>
+          <p:nvPr>
+            <p:ph type="sldImg" idx="2"/>
+          </p:nvPr>
+        </p:nvSpPr>
+        <p:spPr/>
+      </p:sp>
+      <p:sp>
+        <p:nvSpPr>
+          <p:cNvPr id="3" name="Notes Placeholder 2"/>
+          <p:cNvSpPr>
+            <a:spLocks noGrp="1"/>
+          </p:cNvSpPr>
+          <p:nvPr>
+            <p:ph type="body" idx="3" sz="quarter"/>
+          </p:nvPr>
+        </p:nvSpPr>
+        <p:spPr/>
+        <p:txBody>
+          <a:bodyPr/>
+          <a:lstStyle/>
+          <a:p>
+            <a:r>
+              <a:t>module8/examples/string_utils/README.md</a:t>
             </a:r>
           </a:p>
         </p:txBody>
@@ -5982,6 +6772,636 @@
           <a:p>
             <a:r>
               <a:t>From MODULE8 Topics Covered.</a:t>
+            </a:r>
+          </a:p>
+        </p:txBody>
+      </p:sp>
+      <p:sp>
+        <p:nvSpPr>
+          <p:cNvPr id="4" name="Slide Number Placeholder 3"/>
+          <p:cNvSpPr>
+            <a:spLocks noGrp="1"/>
+          </p:cNvSpPr>
+          <p:nvPr>
+            <p:ph type="sldNum" idx="5" sz="quarter"/>
+          </p:nvPr>
+        </p:nvSpPr>
+        <p:spPr/>
+      </p:sp>
+    </p:spTree>
+  </p:cSld>
+  <p:clrMapOvr>
+    <a:masterClrMapping/>
+  </p:clrMapOvr>
+</p:notes>
+</file>
+
+<file path=ppt/notesSlides/notesSlide90.xml><?xml version="1.0" encoding="utf-8"?>
+<p:notes xmlns:a="http://schemas.openxmlformats.org/drawingml/2006/main" xmlns:p="http://schemas.openxmlformats.org/presentationml/2006/main" xmlns:r="http://schemas.openxmlformats.org/officeDocument/2006/relationships">
+  <p:cSld>
+    <p:spTree>
+      <p:nvGrpSpPr>
+        <p:cNvPr id="1" name=""/>
+        <p:cNvGrpSpPr/>
+        <p:nvPr/>
+      </p:nvGrpSpPr>
+      <p:grpSpPr>
+        <a:xfrm>
+          <a:off x="0" y="0"/>
+          <a:ext cx="0" cy="0"/>
+          <a:chOff x="0" y="0"/>
+          <a:chExt cx="0" cy="0"/>
+        </a:xfrm>
+      </p:grpSpPr>
+      <p:sp>
+        <p:nvSpPr>
+          <p:cNvPr id="2" name="Slide Image Placeholder 1"/>
+          <p:cNvSpPr>
+            <a:spLocks noGrp="1"/>
+          </p:cNvSpPr>
+          <p:nvPr>
+            <p:ph type="sldImg" idx="2"/>
+          </p:nvPr>
+        </p:nvSpPr>
+        <p:spPr/>
+      </p:sp>
+      <p:sp>
+        <p:nvSpPr>
+          <p:cNvPr id="3" name="Notes Placeholder 2"/>
+          <p:cNvSpPr>
+            <a:spLocks noGrp="1"/>
+          </p:cNvSpPr>
+          <p:nvPr>
+            <p:ph type="body" idx="3" sz="quarter"/>
+          </p:nvPr>
+        </p:nvSpPr>
+        <p:spPr/>
+        <p:txBody>
+          <a:bodyPr/>
+          <a:lstStyle/>
+          <a:p>
+            <a:r>
+              <a:t>Hands-on: module8/examples/string_utils/</a:t>
+            </a:r>
+          </a:p>
+        </p:txBody>
+      </p:sp>
+      <p:sp>
+        <p:nvSpPr>
+          <p:cNvPr id="4" name="Slide Number Placeholder 3"/>
+          <p:cNvSpPr>
+            <a:spLocks noGrp="1"/>
+          </p:cNvSpPr>
+          <p:nvPr>
+            <p:ph type="sldNum" idx="5" sz="quarter"/>
+          </p:nvPr>
+        </p:nvSpPr>
+        <p:spPr/>
+      </p:sp>
+    </p:spTree>
+  </p:cSld>
+  <p:clrMapOvr>
+    <a:masterClrMapping/>
+  </p:clrMapOvr>
+</p:notes>
+</file>
+
+<file path=ppt/notesSlides/notesSlide91.xml><?xml version="1.0" encoding="utf-8"?>
+<p:notes xmlns:a="http://schemas.openxmlformats.org/drawingml/2006/main" xmlns:p="http://schemas.openxmlformats.org/presentationml/2006/main" xmlns:r="http://schemas.openxmlformats.org/officeDocument/2006/relationships">
+  <p:cSld>
+    <p:spTree>
+      <p:nvGrpSpPr>
+        <p:cNvPr id="1" name=""/>
+        <p:cNvGrpSpPr/>
+        <p:nvPr/>
+      </p:nvGrpSpPr>
+      <p:grpSpPr>
+        <a:xfrm>
+          <a:off x="0" y="0"/>
+          <a:ext cx="0" cy="0"/>
+          <a:chOff x="0" y="0"/>
+          <a:chExt cx="0" cy="0"/>
+        </a:xfrm>
+      </p:grpSpPr>
+      <p:sp>
+        <p:nvSpPr>
+          <p:cNvPr id="2" name="Slide Image Placeholder 1"/>
+          <p:cNvSpPr>
+            <a:spLocks noGrp="1"/>
+          </p:cNvSpPr>
+          <p:nvPr>
+            <p:ph type="sldImg" idx="2"/>
+          </p:nvPr>
+        </p:nvSpPr>
+        <p:spPr/>
+      </p:sp>
+      <p:sp>
+        <p:nvSpPr>
+          <p:cNvPr id="3" name="Notes Placeholder 2"/>
+          <p:cNvSpPr>
+            <a:spLocks noGrp="1"/>
+          </p:cNvSpPr>
+          <p:nvPr>
+            <p:ph type="body" idx="3" sz="quarter"/>
+          </p:nvPr>
+        </p:nvSpPr>
+        <p:spPr/>
+        <p:txBody>
+          <a:bodyPr/>
+          <a:lstStyle/>
+          <a:p>
+            <a:r>
+              <a:t>module8/examples/math_utils/README.md</a:t>
+            </a:r>
+          </a:p>
+        </p:txBody>
+      </p:sp>
+      <p:sp>
+        <p:nvSpPr>
+          <p:cNvPr id="4" name="Slide Number Placeholder 3"/>
+          <p:cNvSpPr>
+            <a:spLocks noGrp="1"/>
+          </p:cNvSpPr>
+          <p:nvPr>
+            <p:ph type="sldNum" idx="5" sz="quarter"/>
+          </p:nvPr>
+        </p:nvSpPr>
+        <p:spPr/>
+      </p:sp>
+    </p:spTree>
+  </p:cSld>
+  <p:clrMapOvr>
+    <a:masterClrMapping/>
+  </p:clrMapOvr>
+</p:notes>
+</file>
+
+<file path=ppt/notesSlides/notesSlide92.xml><?xml version="1.0" encoding="utf-8"?>
+<p:notes xmlns:a="http://schemas.openxmlformats.org/drawingml/2006/main" xmlns:p="http://schemas.openxmlformats.org/presentationml/2006/main" xmlns:r="http://schemas.openxmlformats.org/officeDocument/2006/relationships">
+  <p:cSld>
+    <p:spTree>
+      <p:nvGrpSpPr>
+        <p:cNvPr id="1" name=""/>
+        <p:cNvGrpSpPr/>
+        <p:nvPr/>
+      </p:nvGrpSpPr>
+      <p:grpSpPr>
+        <a:xfrm>
+          <a:off x="0" y="0"/>
+          <a:ext cx="0" cy="0"/>
+          <a:chOff x="0" y="0"/>
+          <a:chExt cx="0" cy="0"/>
+        </a:xfrm>
+      </p:grpSpPr>
+      <p:sp>
+        <p:nvSpPr>
+          <p:cNvPr id="2" name="Slide Image Placeholder 1"/>
+          <p:cNvSpPr>
+            <a:spLocks noGrp="1"/>
+          </p:cNvSpPr>
+          <p:nvPr>
+            <p:ph type="sldImg" idx="2"/>
+          </p:nvPr>
+        </p:nvSpPr>
+        <p:spPr/>
+      </p:sp>
+      <p:sp>
+        <p:nvSpPr>
+          <p:cNvPr id="3" name="Notes Placeholder 2"/>
+          <p:cNvSpPr>
+            <a:spLocks noGrp="1"/>
+          </p:cNvSpPr>
+          <p:nvPr>
+            <p:ph type="body" idx="3" sz="quarter"/>
+          </p:nvPr>
+        </p:nvSpPr>
+        <p:spPr/>
+        <p:txBody>
+          <a:bodyPr/>
+          <a:lstStyle/>
+          <a:p>
+            <a:r>
+              <a:t>Hands-on: module8/examples/math_utils/</a:t>
+            </a:r>
+          </a:p>
+        </p:txBody>
+      </p:sp>
+      <p:sp>
+        <p:nvSpPr>
+          <p:cNvPr id="4" name="Slide Number Placeholder 3"/>
+          <p:cNvSpPr>
+            <a:spLocks noGrp="1"/>
+          </p:cNvSpPr>
+          <p:nvPr>
+            <p:ph type="sldNum" idx="5" sz="quarter"/>
+          </p:nvPr>
+        </p:nvSpPr>
+        <p:spPr/>
+      </p:sp>
+    </p:spTree>
+  </p:cSld>
+  <p:clrMapOvr>
+    <a:masterClrMapping/>
+  </p:clrMapOvr>
+</p:notes>
+</file>
+
+<file path=ppt/notesSlides/notesSlide93.xml><?xml version="1.0" encoding="utf-8"?>
+<p:notes xmlns:a="http://schemas.openxmlformats.org/drawingml/2006/main" xmlns:p="http://schemas.openxmlformats.org/presentationml/2006/main" xmlns:r="http://schemas.openxmlformats.org/officeDocument/2006/relationships">
+  <p:cSld>
+    <p:spTree>
+      <p:nvGrpSpPr>
+        <p:cNvPr id="1" name=""/>
+        <p:cNvGrpSpPr/>
+        <p:nvPr/>
+      </p:nvGrpSpPr>
+      <p:grpSpPr>
+        <a:xfrm>
+          <a:off x="0" y="0"/>
+          <a:ext cx="0" cy="0"/>
+          <a:chOff x="0" y="0"/>
+          <a:chExt cx="0" cy="0"/>
+        </a:xfrm>
+      </p:grpSpPr>
+      <p:sp>
+        <p:nvSpPr>
+          <p:cNvPr id="2" name="Slide Image Placeholder 1"/>
+          <p:cNvSpPr>
+            <a:spLocks noGrp="1"/>
+          </p:cNvSpPr>
+          <p:nvPr>
+            <p:ph type="sldImg" idx="2"/>
+          </p:nvPr>
+        </p:nvSpPr>
+        <p:spPr/>
+      </p:sp>
+      <p:sp>
+        <p:nvSpPr>
+          <p:cNvPr id="3" name="Notes Placeholder 2"/>
+          <p:cNvSpPr>
+            <a:spLocks noGrp="1"/>
+          </p:cNvSpPr>
+          <p:nvPr>
+            <p:ph type="body" idx="3" sz="quarter"/>
+          </p:nvPr>
+        </p:nvSpPr>
+        <p:spPr/>
+        <p:txBody>
+          <a:bodyPr/>
+          <a:lstStyle/>
+          <a:p>
+            <a:r>
+              <a:t>module8/examples/random_utils/README.md</a:t>
+            </a:r>
+          </a:p>
+        </p:txBody>
+      </p:sp>
+      <p:sp>
+        <p:nvSpPr>
+          <p:cNvPr id="4" name="Slide Number Placeholder 3"/>
+          <p:cNvSpPr>
+            <a:spLocks noGrp="1"/>
+          </p:cNvSpPr>
+          <p:nvPr>
+            <p:ph type="sldNum" idx="5" sz="quarter"/>
+          </p:nvPr>
+        </p:nvSpPr>
+        <p:spPr/>
+      </p:sp>
+    </p:spTree>
+  </p:cSld>
+  <p:clrMapOvr>
+    <a:masterClrMapping/>
+  </p:clrMapOvr>
+</p:notes>
+</file>
+
+<file path=ppt/notesSlides/notesSlide94.xml><?xml version="1.0" encoding="utf-8"?>
+<p:notes xmlns:a="http://schemas.openxmlformats.org/drawingml/2006/main" xmlns:p="http://schemas.openxmlformats.org/presentationml/2006/main" xmlns:r="http://schemas.openxmlformats.org/officeDocument/2006/relationships">
+  <p:cSld>
+    <p:spTree>
+      <p:nvGrpSpPr>
+        <p:cNvPr id="1" name=""/>
+        <p:cNvGrpSpPr/>
+        <p:nvPr/>
+      </p:nvGrpSpPr>
+      <p:grpSpPr>
+        <a:xfrm>
+          <a:off x="0" y="0"/>
+          <a:ext cx="0" cy="0"/>
+          <a:chOff x="0" y="0"/>
+          <a:chExt cx="0" cy="0"/>
+        </a:xfrm>
+      </p:grpSpPr>
+      <p:sp>
+        <p:nvSpPr>
+          <p:cNvPr id="2" name="Slide Image Placeholder 1"/>
+          <p:cNvSpPr>
+            <a:spLocks noGrp="1"/>
+          </p:cNvSpPr>
+          <p:nvPr>
+            <p:ph type="sldImg" idx="2"/>
+          </p:nvPr>
+        </p:nvSpPr>
+        <p:spPr/>
+      </p:sp>
+      <p:sp>
+        <p:nvSpPr>
+          <p:cNvPr id="3" name="Notes Placeholder 2"/>
+          <p:cNvSpPr>
+            <a:spLocks noGrp="1"/>
+          </p:cNvSpPr>
+          <p:nvPr>
+            <p:ph type="body" idx="3" sz="quarter"/>
+          </p:nvPr>
+        </p:nvSpPr>
+        <p:spPr/>
+        <p:txBody>
+          <a:bodyPr/>
+          <a:lstStyle/>
+          <a:p>
+            <a:r>
+              <a:t>Hands-on: module8/examples/random_utils/</a:t>
+            </a:r>
+          </a:p>
+        </p:txBody>
+      </p:sp>
+      <p:sp>
+        <p:nvSpPr>
+          <p:cNvPr id="4" name="Slide Number Placeholder 3"/>
+          <p:cNvSpPr>
+            <a:spLocks noGrp="1"/>
+          </p:cNvSpPr>
+          <p:nvPr>
+            <p:ph type="sldNum" idx="5" sz="quarter"/>
+          </p:nvPr>
+        </p:nvSpPr>
+        <p:spPr/>
+      </p:sp>
+    </p:spTree>
+  </p:cSld>
+  <p:clrMapOvr>
+    <a:masterClrMapping/>
+  </p:clrMapOvr>
+</p:notes>
+</file>
+
+<file path=ppt/notesSlides/notesSlide95.xml><?xml version="1.0" encoding="utf-8"?>
+<p:notes xmlns:a="http://schemas.openxmlformats.org/drawingml/2006/main" xmlns:p="http://schemas.openxmlformats.org/presentationml/2006/main" xmlns:r="http://schemas.openxmlformats.org/officeDocument/2006/relationships">
+  <p:cSld>
+    <p:spTree>
+      <p:nvGrpSpPr>
+        <p:cNvPr id="1" name=""/>
+        <p:cNvGrpSpPr/>
+        <p:nvPr/>
+      </p:nvGrpSpPr>
+      <p:grpSpPr>
+        <a:xfrm>
+          <a:off x="0" y="0"/>
+          <a:ext cx="0" cy="0"/>
+          <a:chOff x="0" y="0"/>
+          <a:chExt cx="0" cy="0"/>
+        </a:xfrm>
+      </p:grpSpPr>
+      <p:sp>
+        <p:nvSpPr>
+          <p:cNvPr id="2" name="Slide Image Placeholder 1"/>
+          <p:cNvSpPr>
+            <a:spLocks noGrp="1"/>
+          </p:cNvSpPr>
+          <p:nvPr>
+            <p:ph type="sldImg" idx="2"/>
+          </p:nvPr>
+        </p:nvSpPr>
+        <p:spPr/>
+      </p:sp>
+      <p:sp>
+        <p:nvSpPr>
+          <p:cNvPr id="3" name="Notes Placeholder 2"/>
+          <p:cNvSpPr>
+            <a:spLocks noGrp="1"/>
+          </p:cNvSpPr>
+          <p:nvPr>
+            <p:ph type="body" idx="3" sz="quarter"/>
+          </p:nvPr>
+        </p:nvSpPr>
+        <p:spPr/>
+        <p:txBody>
+          <a:bodyPr/>
+          <a:lstStyle/>
+          <a:p>
+            <a:r>
+              <a:t>module8/examples/integration/README.md</a:t>
+            </a:r>
+          </a:p>
+        </p:txBody>
+      </p:sp>
+      <p:sp>
+        <p:nvSpPr>
+          <p:cNvPr id="4" name="Slide Number Placeholder 3"/>
+          <p:cNvSpPr>
+            <a:spLocks noGrp="1"/>
+          </p:cNvSpPr>
+          <p:nvPr>
+            <p:ph type="sldNum" idx="5" sz="quarter"/>
+          </p:nvPr>
+        </p:nvSpPr>
+        <p:spPr/>
+      </p:sp>
+    </p:spTree>
+  </p:cSld>
+  <p:clrMapOvr>
+    <a:masterClrMapping/>
+  </p:clrMapOvr>
+</p:notes>
+</file>
+
+<file path=ppt/notesSlides/notesSlide96.xml><?xml version="1.0" encoding="utf-8"?>
+<p:notes xmlns:a="http://schemas.openxmlformats.org/drawingml/2006/main" xmlns:p="http://schemas.openxmlformats.org/presentationml/2006/main" xmlns:r="http://schemas.openxmlformats.org/officeDocument/2006/relationships">
+  <p:cSld>
+    <p:spTree>
+      <p:nvGrpSpPr>
+        <p:cNvPr id="1" name=""/>
+        <p:cNvGrpSpPr/>
+        <p:nvPr/>
+      </p:nvGrpSpPr>
+      <p:grpSpPr>
+        <a:xfrm>
+          <a:off x="0" y="0"/>
+          <a:ext cx="0" cy="0"/>
+          <a:chOff x="0" y="0"/>
+          <a:chExt cx="0" cy="0"/>
+        </a:xfrm>
+      </p:grpSpPr>
+      <p:sp>
+        <p:nvSpPr>
+          <p:cNvPr id="2" name="Slide Image Placeholder 1"/>
+          <p:cNvSpPr>
+            <a:spLocks noGrp="1"/>
+          </p:cNvSpPr>
+          <p:nvPr>
+            <p:ph type="sldImg" idx="2"/>
+          </p:nvPr>
+        </p:nvSpPr>
+        <p:spPr/>
+      </p:sp>
+      <p:sp>
+        <p:nvSpPr>
+          <p:cNvPr id="3" name="Notes Placeholder 2"/>
+          <p:cNvSpPr>
+            <a:spLocks noGrp="1"/>
+          </p:cNvSpPr>
+          <p:nvPr>
+            <p:ph type="body" idx="3" sz="quarter"/>
+          </p:nvPr>
+        </p:nvSpPr>
+        <p:spPr/>
+        <p:txBody>
+          <a:bodyPr/>
+          <a:lstStyle/>
+          <a:p>
+            <a:r>
+              <a:t>Hands-on: module8/examples/integration/</a:t>
+            </a:r>
+          </a:p>
+        </p:txBody>
+      </p:sp>
+      <p:sp>
+        <p:nvSpPr>
+          <p:cNvPr id="4" name="Slide Number Placeholder 3"/>
+          <p:cNvSpPr>
+            <a:spLocks noGrp="1"/>
+          </p:cNvSpPr>
+          <p:nvPr>
+            <p:ph type="sldNum" idx="5" sz="quarter"/>
+          </p:nvPr>
+        </p:nvSpPr>
+        <p:spPr/>
+      </p:sp>
+    </p:spTree>
+  </p:cSld>
+  <p:clrMapOvr>
+    <a:masterClrMapping/>
+  </p:clrMapOvr>
+</p:notes>
+</file>
+
+<file path=ppt/notesSlides/notesSlide97.xml><?xml version="1.0" encoding="utf-8"?>
+<p:notes xmlns:a="http://schemas.openxmlformats.org/drawingml/2006/main" xmlns:p="http://schemas.openxmlformats.org/presentationml/2006/main" xmlns:r="http://schemas.openxmlformats.org/officeDocument/2006/relationships">
+  <p:cSld>
+    <p:spTree>
+      <p:nvGrpSpPr>
+        <p:cNvPr id="1" name=""/>
+        <p:cNvGrpSpPr/>
+        <p:nvPr/>
+      </p:nvGrpSpPr>
+      <p:grpSpPr>
+        <a:xfrm>
+          <a:off x="0" y="0"/>
+          <a:ext cx="0" cy="0"/>
+          <a:chOff x="0" y="0"/>
+          <a:chExt cx="0" cy="0"/>
+        </a:xfrm>
+      </p:grpSpPr>
+      <p:sp>
+        <p:nvSpPr>
+          <p:cNvPr id="2" name="Slide Image Placeholder 1"/>
+          <p:cNvSpPr>
+            <a:spLocks noGrp="1"/>
+          </p:cNvSpPr>
+          <p:nvPr>
+            <p:ph type="sldImg" idx="2"/>
+          </p:nvPr>
+        </p:nvSpPr>
+        <p:spPr/>
+      </p:sp>
+      <p:sp>
+        <p:nvSpPr>
+          <p:cNvPr id="3" name="Notes Placeholder 2"/>
+          <p:cNvSpPr>
+            <a:spLocks noGrp="1"/>
+          </p:cNvSpPr>
+          <p:nvPr>
+            <p:ph type="body" idx="3" sz="quarter"/>
+          </p:nvPr>
+        </p:nvSpPr>
+        <p:spPr/>
+        <p:txBody>
+          <a:bodyPr/>
+          <a:lstStyle/>
+          <a:p>
+            <a:r>
+              <a:t>From MODULE8 Learning Outcomes.</a:t>
+            </a:r>
+          </a:p>
+        </p:txBody>
+      </p:sp>
+      <p:sp>
+        <p:nvSpPr>
+          <p:cNvPr id="4" name="Slide Number Placeholder 3"/>
+          <p:cNvSpPr>
+            <a:spLocks noGrp="1"/>
+          </p:cNvSpPr>
+          <p:nvPr>
+            <p:ph type="sldNum" idx="5" sz="quarter"/>
+          </p:nvPr>
+        </p:nvSpPr>
+        <p:spPr/>
+      </p:sp>
+    </p:spTree>
+  </p:cSld>
+  <p:clrMapOvr>
+    <a:masterClrMapping/>
+  </p:clrMapOvr>
+</p:notes>
+</file>
+
+<file path=ppt/notesSlides/notesSlide98.xml><?xml version="1.0" encoding="utf-8"?>
+<p:notes xmlns:a="http://schemas.openxmlformats.org/drawingml/2006/main" xmlns:p="http://schemas.openxmlformats.org/presentationml/2006/main" xmlns:r="http://schemas.openxmlformats.org/officeDocument/2006/relationships">
+  <p:cSld>
+    <p:spTree>
+      <p:nvGrpSpPr>
+        <p:cNvPr id="1" name=""/>
+        <p:cNvGrpSpPr/>
+        <p:nvPr/>
+      </p:nvGrpSpPr>
+      <p:grpSpPr>
+        <a:xfrm>
+          <a:off x="0" y="0"/>
+          <a:ext cx="0" cy="0"/>
+          <a:chOff x="0" y="0"/>
+          <a:chExt cx="0" cy="0"/>
+        </a:xfrm>
+      </p:grpSpPr>
+      <p:sp>
+        <p:nvSpPr>
+          <p:cNvPr id="2" name="Slide Image Placeholder 1"/>
+          <p:cNvSpPr>
+            <a:spLocks noGrp="1"/>
+          </p:cNvSpPr>
+          <p:nvPr>
+            <p:ph type="sldImg" idx="2"/>
+          </p:nvPr>
+        </p:nvSpPr>
+        <p:spPr/>
+      </p:sp>
+      <p:sp>
+        <p:nvSpPr>
+          <p:cNvPr id="3" name="Notes Placeholder 2"/>
+          <p:cNvSpPr>
+            <a:spLocks noGrp="1"/>
+          </p:cNvSpPr>
+          <p:nvPr>
+            <p:ph type="body" idx="3" sz="quarter"/>
+          </p:nvPr>
+        </p:nvSpPr>
+        <p:spPr/>
+        <p:txBody>
+          <a:bodyPr/>
+          <a:lstStyle/>
+          <a:p>
+            <a:r>
+              <a:t>From MODULE8 Learning Outcomes.</a:t>
             </a:r>
           </a:p>
         </p:txBody>
@@ -9423,6 +10843,1852 @@
 </p:sld>
 </file>
 
+<file path=ppt/slides/slide100.xml><?xml version="1.0" encoding="utf-8"?>
+<p:sld xmlns:a="http://schemas.openxmlformats.org/drawingml/2006/main" xmlns:p="http://schemas.openxmlformats.org/presentationml/2006/main" xmlns:r="http://schemas.openxmlformats.org/officeDocument/2006/relationships">
+  <p:cSld>
+    <p:spTree>
+      <p:nvGrpSpPr>
+        <p:cNvPr id="1" name=""/>
+        <p:cNvGrpSpPr/>
+        <p:nvPr/>
+      </p:nvGrpSpPr>
+      <p:grpSpPr/>
+      <p:sp>
+        <p:nvSpPr>
+          <p:cNvPr id="2" name="TextBox 1"/>
+          <p:cNvSpPr txBox="1"/>
+          <p:nvPr/>
+        </p:nvSpPr>
+        <p:spPr>
+          <a:xfrm>
+            <a:off x="548640" y="411480"/>
+            <a:ext cx="11064240" cy="777240"/>
+          </a:xfrm>
+          <a:prstGeom prst="rect">
+            <a:avLst/>
+          </a:prstGeom>
+          <a:noFill/>
+        </p:spPr>
+        <p:txBody>
+          <a:bodyPr wrap="square">
+            <a:noAutofit/>
+          </a:bodyPr>
+          <a:lstStyle/>
+          <a:p>
+            <a:pPr>
+              <a:lnSpc>
+                <a:spcPts val="2200"/>
+              </a:lnSpc>
+              <a:defRPr sz="2800" b="1">
+                <a:solidFill>
+                  <a:srgbClr val="1A1A2E"/>
+                </a:solidFill>
+                <a:latin typeface="Calibri"/>
+              </a:defRPr>
+            </a:pPr>
+            <a:r>
+              <a:t>Example 8: Random Utilities</a:t>
+            </a:r>
+          </a:p>
+        </p:txBody>
+      </p:sp>
+      <p:sp>
+        <p:nvSpPr>
+          <p:cNvPr id="3" name="TextBox 2"/>
+          <p:cNvSpPr txBox="1"/>
+          <p:nvPr/>
+        </p:nvSpPr>
+        <p:spPr>
+          <a:xfrm>
+            <a:off x="548640" y="1234440"/>
+            <a:ext cx="11064240" cy="4937760"/>
+          </a:xfrm>
+          <a:prstGeom prst="rect">
+            <a:avLst/>
+          </a:prstGeom>
+          <a:noFill/>
+        </p:spPr>
+        <p:txBody>
+          <a:bodyPr wrap="square">
+            <a:noAutofit/>
+          </a:bodyPr>
+          <a:lstStyle/>
+          <a:p>
+            <a:pPr>
+              <a:lnSpc>
+                <a:spcPts val="2200"/>
+              </a:lnSpc>
+              <a:spcAft>
+                <a:spcPts val="1000"/>
+              </a:spcAft>
+              <a:defRPr sz="2000" b="0">
+                <a:solidFill>
+                  <a:srgbClr val="333333"/>
+                </a:solidFill>
+                <a:latin typeface="Calibri"/>
+              </a:defRPr>
+            </a:pPr>
+            <a:r>
+              <a:t>• RandomUtils: Utility class for random operations</a:t>
+            </a:r>
+          </a:p>
+          <a:p>
+            <a:pPr>
+              <a:lnSpc>
+                <a:spcPts val="2200"/>
+              </a:lnSpc>
+              <a:spcAft>
+                <a:spcPts val="1000"/>
+              </a:spcAft>
+              <a:defRPr sz="2000" b="0">
+                <a:solidFill>
+                  <a:srgbClr val="333333"/>
+                </a:solidFill>
+                <a:latin typeface="Calibri"/>
+              </a:defRPr>
+            </a:pPr>
+            <a:r>
+              <a:t>• RandomTest: Test demonstrating random utilities</a:t>
+            </a:r>
+          </a:p>
+        </p:txBody>
+      </p:sp>
+      <p:sp>
+        <p:nvSpPr>
+          <p:cNvPr id="4" name="TextBox 3"/>
+          <p:cNvSpPr txBox="1"/>
+          <p:nvPr/>
+        </p:nvSpPr>
+        <p:spPr>
+          <a:xfrm>
+            <a:off x="548640" y="6355080"/>
+            <a:ext cx="11064240" cy="320040"/>
+          </a:xfrm>
+          <a:prstGeom prst="rect">
+            <a:avLst/>
+          </a:prstGeom>
+          <a:noFill/>
+        </p:spPr>
+        <p:txBody>
+          <a:bodyPr wrap="square">
+            <a:noAutofit/>
+          </a:bodyPr>
+          <a:lstStyle/>
+          <a:p>
+            <a:pPr algn="r">
+              <a:lnSpc>
+                <a:spcPts val="2200"/>
+              </a:lnSpc>
+              <a:defRPr sz="1000" b="0">
+                <a:solidFill>
+                  <a:srgbClr val="666666"/>
+                </a:solidFill>
+                <a:latin typeface="Calibri"/>
+              </a:defRPr>
+            </a:pPr>
+            <a:r>
+              <a:t>learn_uvm2017_sv_verilator / Module 8</a:t>
+            </a:r>
+          </a:p>
+        </p:txBody>
+      </p:sp>
+    </p:spTree>
+  </p:cSld>
+  <p:clrMapOvr>
+    <a:masterClrMapping/>
+  </p:clrMapOvr>
+</p:sld>
+</file>
+
+<file path=ppt/slides/slide101.xml><?xml version="1.0" encoding="utf-8"?>
+<p:sld xmlns:a="http://schemas.openxmlformats.org/drawingml/2006/main" xmlns:p="http://schemas.openxmlformats.org/presentationml/2006/main" xmlns:r="http://schemas.openxmlformats.org/officeDocument/2006/relationships">
+  <p:cSld>
+    <p:spTree>
+      <p:nvGrpSpPr>
+        <p:cNvPr id="1" name=""/>
+        <p:cNvGrpSpPr/>
+        <p:nvPr/>
+      </p:nvGrpSpPr>
+      <p:grpSpPr/>
+      <p:sp>
+        <p:nvSpPr>
+          <p:cNvPr id="2" name="TextBox 1"/>
+          <p:cNvSpPr txBox="1"/>
+          <p:nvPr/>
+        </p:nvSpPr>
+        <p:spPr>
+          <a:xfrm>
+            <a:off x="548640" y="411480"/>
+            <a:ext cx="11064240" cy="777240"/>
+          </a:xfrm>
+          <a:prstGeom prst="rect">
+            <a:avLst/>
+          </a:prstGeom>
+          <a:noFill/>
+        </p:spPr>
+        <p:txBody>
+          <a:bodyPr wrap="square">
+            <a:noAutofit/>
+          </a:bodyPr>
+          <a:lstStyle/>
+          <a:p>
+            <a:pPr>
+              <a:lnSpc>
+                <a:spcPts val="2200"/>
+              </a:lnSpc>
+              <a:defRPr sz="2800" b="1">
+                <a:solidFill>
+                  <a:srgbClr val="1A1A2E"/>
+                </a:solidFill>
+                <a:latin typeface="Calibri"/>
+              </a:defRPr>
+            </a:pPr>
+            <a:r>
+              <a:t>Demo: Random Utilities</a:t>
+            </a:r>
+          </a:p>
+        </p:txBody>
+      </p:sp>
+      <p:sp>
+        <p:nvSpPr>
+          <p:cNvPr id="3" name="TextBox 2"/>
+          <p:cNvSpPr txBox="1"/>
+          <p:nvPr/>
+        </p:nvSpPr>
+        <p:spPr>
+          <a:xfrm>
+            <a:off x="548640" y="1051560"/>
+            <a:ext cx="11064240" cy="914400"/>
+          </a:xfrm>
+          <a:prstGeom prst="rect">
+            <a:avLst/>
+          </a:prstGeom>
+          <a:solidFill>
+            <a:srgbClr val="F4F4F4"/>
+          </a:solidFill>
+        </p:spPr>
+        <p:txBody>
+          <a:bodyPr wrap="square">
+            <a:noAutofit/>
+          </a:bodyPr>
+          <a:lstStyle/>
+          <a:p>
+            <a:pPr>
+              <a:lnSpc>
+                <a:spcPts val="2200"/>
+              </a:lnSpc>
+              <a:spcAft>
+                <a:spcPts val="200"/>
+              </a:spcAft>
+              <a:defRPr sz="2000" b="0">
+                <a:solidFill>
+                  <a:srgbClr val="333333"/>
+                </a:solidFill>
+                <a:latin typeface="Consolas"/>
+              </a:defRPr>
+            </a:pPr>
+            <a:r>
+              <a:t>$ ./scripts/module8.sh --random-utils</a:t>
+            </a:r>
+          </a:p>
+        </p:txBody>
+      </p:sp>
+      <p:pic>
+        <p:nvPicPr>
+          <p:cNvPr id="4" name="Picture 3" descr="ex08_random_utils.png"/>
+          <p:cNvPicPr>
+            <a:picLocks noChangeAspect="1"/>
+          </p:cNvPicPr>
+          <p:nvPr/>
+        </p:nvPicPr>
+        <p:blipFill>
+          <a:blip r:embed="rId2"/>
+          <a:stretch>
+            <a:fillRect/>
+          </a:stretch>
+        </p:blipFill>
+        <p:spPr>
+          <a:xfrm>
+            <a:off x="548640" y="1965960"/>
+            <a:ext cx="7071358" cy="3977639"/>
+          </a:xfrm>
+          <a:prstGeom prst="rect">
+            <a:avLst/>
+          </a:prstGeom>
+        </p:spPr>
+      </p:pic>
+      <p:sp>
+        <p:nvSpPr>
+          <p:cNvPr id="5" name="TextBox 4"/>
+          <p:cNvSpPr txBox="1"/>
+          <p:nvPr/>
+        </p:nvSpPr>
+        <p:spPr>
+          <a:xfrm>
+            <a:off x="548640" y="6355080"/>
+            <a:ext cx="11064240" cy="320040"/>
+          </a:xfrm>
+          <a:prstGeom prst="rect">
+            <a:avLst/>
+          </a:prstGeom>
+          <a:noFill/>
+        </p:spPr>
+        <p:txBody>
+          <a:bodyPr wrap="square">
+            <a:noAutofit/>
+          </a:bodyPr>
+          <a:lstStyle/>
+          <a:p>
+            <a:pPr algn="r">
+              <a:lnSpc>
+                <a:spcPts val="2200"/>
+              </a:lnSpc>
+              <a:defRPr sz="1000" b="0">
+                <a:solidFill>
+                  <a:srgbClr val="666666"/>
+                </a:solidFill>
+                <a:latin typeface="Calibri"/>
+              </a:defRPr>
+            </a:pPr>
+            <a:r>
+              <a:t>learn_uvm2017_sv_verilator / Module 8</a:t>
+            </a:r>
+          </a:p>
+        </p:txBody>
+      </p:sp>
+    </p:spTree>
+  </p:cSld>
+  <p:clrMapOvr>
+    <a:masterClrMapping/>
+  </p:clrMapOvr>
+</p:sld>
+</file>
+
+<file path=ppt/slides/slide102.xml><?xml version="1.0" encoding="utf-8"?>
+<p:sld xmlns:a="http://schemas.openxmlformats.org/drawingml/2006/main" xmlns:p="http://schemas.openxmlformats.org/presentationml/2006/main" xmlns:r="http://schemas.openxmlformats.org/officeDocument/2006/relationships">
+  <p:cSld>
+    <p:spTree>
+      <p:nvGrpSpPr>
+        <p:cNvPr id="1" name=""/>
+        <p:cNvGrpSpPr/>
+        <p:nvPr/>
+      </p:nvGrpSpPr>
+      <p:grpSpPr/>
+      <p:sp>
+        <p:nvSpPr>
+          <p:cNvPr id="2" name="TextBox 1"/>
+          <p:cNvSpPr txBox="1"/>
+          <p:nvPr/>
+        </p:nvSpPr>
+        <p:spPr>
+          <a:xfrm>
+            <a:off x="548640" y="411480"/>
+            <a:ext cx="11064240" cy="777240"/>
+          </a:xfrm>
+          <a:prstGeom prst="rect">
+            <a:avLst/>
+          </a:prstGeom>
+          <a:noFill/>
+        </p:spPr>
+        <p:txBody>
+          <a:bodyPr wrap="square">
+            <a:noAutofit/>
+          </a:bodyPr>
+          <a:lstStyle/>
+          <a:p>
+            <a:pPr>
+              <a:lnSpc>
+                <a:spcPts val="2200"/>
+              </a:lnSpc>
+              <a:defRPr sz="2800" b="1">
+                <a:solidFill>
+                  <a:srgbClr val="1A1A2E"/>
+                </a:solidFill>
+                <a:latin typeface="Calibri"/>
+              </a:defRPr>
+            </a:pPr>
+            <a:r>
+              <a:t>Example 9: Integration</a:t>
+            </a:r>
+          </a:p>
+        </p:txBody>
+      </p:sp>
+      <p:sp>
+        <p:nvSpPr>
+          <p:cNvPr id="3" name="TextBox 2"/>
+          <p:cNvSpPr txBox="1"/>
+          <p:nvPr/>
+        </p:nvSpPr>
+        <p:spPr>
+          <a:xfrm>
+            <a:off x="548640" y="1234440"/>
+            <a:ext cx="11064240" cy="4937760"/>
+          </a:xfrm>
+          <a:prstGeom prst="rect">
+            <a:avLst/>
+          </a:prstGeom>
+          <a:noFill/>
+        </p:spPr>
+        <p:txBody>
+          <a:bodyPr wrap="square">
+            <a:noAutofit/>
+          </a:bodyPr>
+          <a:lstStyle/>
+          <a:p>
+            <a:pPr>
+              <a:lnSpc>
+                <a:spcPts val="2200"/>
+              </a:lnSpc>
+              <a:spcAft>
+                <a:spcPts val="1000"/>
+              </a:spcAft>
+              <a:defRPr sz="2000" b="0">
+                <a:solidFill>
+                  <a:srgbClr val="333333"/>
+                </a:solidFill>
+                <a:latin typeface="Calibri"/>
+              </a:defRPr>
+            </a:pPr>
+            <a:r>
+              <a:t>• IntegrationTest: Test combining multiple utilities</a:t>
+            </a:r>
+          </a:p>
+          <a:p>
+            <a:pPr>
+              <a:lnSpc>
+                <a:spcPts val="2200"/>
+              </a:lnSpc>
+              <a:spcAft>
+                <a:spcPts val="1000"/>
+              </a:spcAft>
+              <a:defRPr sz="2000" b="0">
+                <a:solidFill>
+                  <a:srgbClr val="333333"/>
+                </a:solidFill>
+                <a:latin typeface="Calibri"/>
+              </a:defRPr>
+            </a:pPr>
+            <a:r>
+              <a:t>• Combined utility usage</a:t>
+            </a:r>
+          </a:p>
+          <a:p>
+            <a:pPr>
+              <a:lnSpc>
+                <a:spcPts val="2200"/>
+              </a:lnSpc>
+              <a:spcAft>
+                <a:spcPts val="1000"/>
+              </a:spcAft>
+              <a:defRPr sz="2000" b="0">
+                <a:solidFill>
+                  <a:srgbClr val="333333"/>
+                </a:solidFill>
+                <a:latin typeface="Calibri"/>
+              </a:defRPr>
+            </a:pPr>
+            <a:r>
+              <a:t>• Transaction recording and queuing</a:t>
+            </a:r>
+          </a:p>
+        </p:txBody>
+      </p:sp>
+      <p:sp>
+        <p:nvSpPr>
+          <p:cNvPr id="4" name="TextBox 3"/>
+          <p:cNvSpPr txBox="1"/>
+          <p:nvPr/>
+        </p:nvSpPr>
+        <p:spPr>
+          <a:xfrm>
+            <a:off x="548640" y="6355080"/>
+            <a:ext cx="11064240" cy="320040"/>
+          </a:xfrm>
+          <a:prstGeom prst="rect">
+            <a:avLst/>
+          </a:prstGeom>
+          <a:noFill/>
+        </p:spPr>
+        <p:txBody>
+          <a:bodyPr wrap="square">
+            <a:noAutofit/>
+          </a:bodyPr>
+          <a:lstStyle/>
+          <a:p>
+            <a:pPr algn="r">
+              <a:lnSpc>
+                <a:spcPts val="2200"/>
+              </a:lnSpc>
+              <a:defRPr sz="1000" b="0">
+                <a:solidFill>
+                  <a:srgbClr val="666666"/>
+                </a:solidFill>
+                <a:latin typeface="Calibri"/>
+              </a:defRPr>
+            </a:pPr>
+            <a:r>
+              <a:t>learn_uvm2017_sv_verilator / Module 8</a:t>
+            </a:r>
+          </a:p>
+        </p:txBody>
+      </p:sp>
+    </p:spTree>
+  </p:cSld>
+  <p:clrMapOvr>
+    <a:masterClrMapping/>
+  </p:clrMapOvr>
+</p:sld>
+</file>
+
+<file path=ppt/slides/slide103.xml><?xml version="1.0" encoding="utf-8"?>
+<p:sld xmlns:a="http://schemas.openxmlformats.org/drawingml/2006/main" xmlns:p="http://schemas.openxmlformats.org/presentationml/2006/main" xmlns:r="http://schemas.openxmlformats.org/officeDocument/2006/relationships">
+  <p:cSld>
+    <p:spTree>
+      <p:nvGrpSpPr>
+        <p:cNvPr id="1" name=""/>
+        <p:cNvGrpSpPr/>
+        <p:nvPr/>
+      </p:nvGrpSpPr>
+      <p:grpSpPr/>
+      <p:sp>
+        <p:nvSpPr>
+          <p:cNvPr id="2" name="TextBox 1"/>
+          <p:cNvSpPr txBox="1"/>
+          <p:nvPr/>
+        </p:nvSpPr>
+        <p:spPr>
+          <a:xfrm>
+            <a:off x="548640" y="411480"/>
+            <a:ext cx="11064240" cy="777240"/>
+          </a:xfrm>
+          <a:prstGeom prst="rect">
+            <a:avLst/>
+          </a:prstGeom>
+          <a:noFill/>
+        </p:spPr>
+        <p:txBody>
+          <a:bodyPr wrap="square">
+            <a:noAutofit/>
+          </a:bodyPr>
+          <a:lstStyle/>
+          <a:p>
+            <a:pPr>
+              <a:lnSpc>
+                <a:spcPts val="2200"/>
+              </a:lnSpc>
+              <a:defRPr sz="2800" b="1">
+                <a:solidFill>
+                  <a:srgbClr val="1A1A2E"/>
+                </a:solidFill>
+                <a:latin typeface="Calibri"/>
+              </a:defRPr>
+            </a:pPr>
+            <a:r>
+              <a:t>Demo: Integration</a:t>
+            </a:r>
+          </a:p>
+        </p:txBody>
+      </p:sp>
+      <p:sp>
+        <p:nvSpPr>
+          <p:cNvPr id="3" name="TextBox 2"/>
+          <p:cNvSpPr txBox="1"/>
+          <p:nvPr/>
+        </p:nvSpPr>
+        <p:spPr>
+          <a:xfrm>
+            <a:off x="548640" y="1051560"/>
+            <a:ext cx="11064240" cy="914400"/>
+          </a:xfrm>
+          <a:prstGeom prst="rect">
+            <a:avLst/>
+          </a:prstGeom>
+          <a:solidFill>
+            <a:srgbClr val="F4F4F4"/>
+          </a:solidFill>
+        </p:spPr>
+        <p:txBody>
+          <a:bodyPr wrap="square">
+            <a:noAutofit/>
+          </a:bodyPr>
+          <a:lstStyle/>
+          <a:p>
+            <a:pPr>
+              <a:lnSpc>
+                <a:spcPts val="2200"/>
+              </a:lnSpc>
+              <a:spcAft>
+                <a:spcPts val="200"/>
+              </a:spcAft>
+              <a:defRPr sz="2000" b="0">
+                <a:solidFill>
+                  <a:srgbClr val="333333"/>
+                </a:solidFill>
+                <a:latin typeface="Consolas"/>
+              </a:defRPr>
+            </a:pPr>
+            <a:r>
+              <a:t>$ ./scripts/module8.sh --integration</a:t>
+            </a:r>
+          </a:p>
+        </p:txBody>
+      </p:sp>
+      <p:pic>
+        <p:nvPicPr>
+          <p:cNvPr id="4" name="Picture 3" descr="ex09_integration.png"/>
+          <p:cNvPicPr>
+            <a:picLocks noChangeAspect="1"/>
+          </p:cNvPicPr>
+          <p:nvPr/>
+        </p:nvPicPr>
+        <p:blipFill>
+          <a:blip r:embed="rId2"/>
+          <a:stretch>
+            <a:fillRect/>
+          </a:stretch>
+        </p:blipFill>
+        <p:spPr>
+          <a:xfrm>
+            <a:off x="548640" y="1965960"/>
+            <a:ext cx="7071358" cy="3977639"/>
+          </a:xfrm>
+          <a:prstGeom prst="rect">
+            <a:avLst/>
+          </a:prstGeom>
+        </p:spPr>
+      </p:pic>
+      <p:sp>
+        <p:nvSpPr>
+          <p:cNvPr id="5" name="TextBox 4"/>
+          <p:cNvSpPr txBox="1"/>
+          <p:nvPr/>
+        </p:nvSpPr>
+        <p:spPr>
+          <a:xfrm>
+            <a:off x="548640" y="6355080"/>
+            <a:ext cx="11064240" cy="320040"/>
+          </a:xfrm>
+          <a:prstGeom prst="rect">
+            <a:avLst/>
+          </a:prstGeom>
+          <a:noFill/>
+        </p:spPr>
+        <p:txBody>
+          <a:bodyPr wrap="square">
+            <a:noAutofit/>
+          </a:bodyPr>
+          <a:lstStyle/>
+          <a:p>
+            <a:pPr algn="r">
+              <a:lnSpc>
+                <a:spcPts val="2200"/>
+              </a:lnSpc>
+              <a:defRPr sz="1000" b="0">
+                <a:solidFill>
+                  <a:srgbClr val="666666"/>
+                </a:solidFill>
+                <a:latin typeface="Calibri"/>
+              </a:defRPr>
+            </a:pPr>
+            <a:r>
+              <a:t>learn_uvm2017_sv_verilator / Module 8</a:t>
+            </a:r>
+          </a:p>
+        </p:txBody>
+      </p:sp>
+    </p:spTree>
+  </p:cSld>
+  <p:clrMapOvr>
+    <a:masterClrMapping/>
+  </p:clrMapOvr>
+</p:sld>
+</file>
+
+<file path=ppt/slides/slide104.xml><?xml version="1.0" encoding="utf-8"?>
+<p:sld xmlns:a="http://schemas.openxmlformats.org/drawingml/2006/main" xmlns:p="http://schemas.openxmlformats.org/presentationml/2006/main" xmlns:r="http://schemas.openxmlformats.org/officeDocument/2006/relationships">
+  <p:cSld>
+    <p:spTree>
+      <p:nvGrpSpPr>
+        <p:cNvPr id="1" name=""/>
+        <p:cNvGrpSpPr/>
+        <p:nvPr/>
+      </p:nvGrpSpPr>
+      <p:grpSpPr/>
+      <p:sp>
+        <p:nvSpPr>
+          <p:cNvPr id="2" name="TextBox 1"/>
+          <p:cNvSpPr txBox="1"/>
+          <p:nvPr/>
+        </p:nvSpPr>
+        <p:spPr>
+          <a:xfrm>
+            <a:off x="548640" y="2743200"/>
+            <a:ext cx="11064240" cy="1371600"/>
+          </a:xfrm>
+          <a:prstGeom prst="rect">
+            <a:avLst/>
+          </a:prstGeom>
+          <a:noFill/>
+        </p:spPr>
+        <p:txBody>
+          <a:bodyPr wrap="square">
+            <a:noAutofit/>
+          </a:bodyPr>
+          <a:lstStyle/>
+          <a:p>
+            <a:pPr algn="ctr">
+              <a:lnSpc>
+                <a:spcPts val="2200"/>
+              </a:lnSpc>
+              <a:defRPr sz="3600" b="1">
+                <a:solidFill>
+                  <a:srgbClr val="1A1A2E"/>
+                </a:solidFill>
+                <a:latin typeface="Calibri"/>
+              </a:defRPr>
+            </a:pPr>
+            <a:r>
+              <a:t>Practice &amp; assessment</a:t>
+            </a:r>
+          </a:p>
+        </p:txBody>
+      </p:sp>
+      <p:sp>
+        <p:nvSpPr>
+          <p:cNvPr id="3" name="TextBox 2"/>
+          <p:cNvSpPr txBox="1"/>
+          <p:nvPr/>
+        </p:nvSpPr>
+        <p:spPr>
+          <a:xfrm>
+            <a:off x="548640" y="6355080"/>
+            <a:ext cx="11064240" cy="320040"/>
+          </a:xfrm>
+          <a:prstGeom prst="rect">
+            <a:avLst/>
+          </a:prstGeom>
+          <a:noFill/>
+        </p:spPr>
+        <p:txBody>
+          <a:bodyPr wrap="square">
+            <a:noAutofit/>
+          </a:bodyPr>
+          <a:lstStyle/>
+          <a:p>
+            <a:pPr algn="r">
+              <a:lnSpc>
+                <a:spcPts val="2200"/>
+              </a:lnSpc>
+              <a:defRPr sz="1000" b="0">
+                <a:solidFill>
+                  <a:srgbClr val="666666"/>
+                </a:solidFill>
+                <a:latin typeface="Calibri"/>
+              </a:defRPr>
+            </a:pPr>
+            <a:r>
+              <a:t>learn_uvm2017_sv_verilator / Module 8</a:t>
+            </a:r>
+          </a:p>
+        </p:txBody>
+      </p:sp>
+    </p:spTree>
+  </p:cSld>
+  <p:clrMapOvr>
+    <a:masterClrMapping/>
+  </p:clrMapOvr>
+</p:sld>
+</file>
+
+<file path=ppt/slides/slide105.xml><?xml version="1.0" encoding="utf-8"?>
+<p:sld xmlns:a="http://schemas.openxmlformats.org/drawingml/2006/main" xmlns:p="http://schemas.openxmlformats.org/presentationml/2006/main" xmlns:r="http://schemas.openxmlformats.org/officeDocument/2006/relationships">
+  <p:cSld>
+    <p:spTree>
+      <p:nvGrpSpPr>
+        <p:cNvPr id="1" name=""/>
+        <p:cNvGrpSpPr/>
+        <p:nvPr/>
+      </p:nvGrpSpPr>
+      <p:grpSpPr/>
+      <p:sp>
+        <p:nvSpPr>
+          <p:cNvPr id="2" name="TextBox 1"/>
+          <p:cNvSpPr txBox="1"/>
+          <p:nvPr/>
+        </p:nvSpPr>
+        <p:spPr>
+          <a:xfrm>
+            <a:off x="548640" y="411480"/>
+            <a:ext cx="11064240" cy="777240"/>
+          </a:xfrm>
+          <a:prstGeom prst="rect">
+            <a:avLst/>
+          </a:prstGeom>
+          <a:noFill/>
+        </p:spPr>
+        <p:txBody>
+          <a:bodyPr wrap="square">
+            <a:noAutofit/>
+          </a:bodyPr>
+          <a:lstStyle/>
+          <a:p>
+            <a:pPr>
+              <a:lnSpc>
+                <a:spcPts val="2200"/>
+              </a:lnSpc>
+              <a:defRPr sz="2800" b="1">
+                <a:solidFill>
+                  <a:srgbClr val="1A1A2E"/>
+                </a:solidFill>
+                <a:latin typeface="Calibri"/>
+              </a:defRPr>
+            </a:pPr>
+            <a:r>
+              <a:t>What you should know (1/2)</a:t>
+            </a:r>
+          </a:p>
+        </p:txBody>
+      </p:sp>
+      <p:sp>
+        <p:nvSpPr>
+          <p:cNvPr id="3" name="TextBox 2"/>
+          <p:cNvSpPr txBox="1"/>
+          <p:nvPr/>
+        </p:nvSpPr>
+        <p:spPr>
+          <a:xfrm>
+            <a:off x="548640" y="1234440"/>
+            <a:ext cx="11064240" cy="4937760"/>
+          </a:xfrm>
+          <a:prstGeom prst="rect">
+            <a:avLst/>
+          </a:prstGeom>
+          <a:noFill/>
+        </p:spPr>
+        <p:txBody>
+          <a:bodyPr wrap="square">
+            <a:noAutofit/>
+          </a:bodyPr>
+          <a:lstStyle/>
+          <a:p>
+            <a:pPr>
+              <a:lnSpc>
+                <a:spcPts val="2200"/>
+              </a:lnSpc>
+              <a:spcAft>
+                <a:spcPts val="1000"/>
+              </a:spcAft>
+              <a:defRPr sz="2000" b="0">
+                <a:solidFill>
+                  <a:srgbClr val="333333"/>
+                </a:solidFill>
+                <a:latin typeface="Calibri"/>
+              </a:defRPr>
+            </a:pPr>
+            <a:r>
+              <a:t>• Use UVM utility classes effectively</a:t>
+            </a:r>
+          </a:p>
+          <a:p>
+            <a:pPr>
+              <a:lnSpc>
+                <a:spcPts val="2200"/>
+              </a:lnSpc>
+              <a:spcAft>
+                <a:spcPts val="1000"/>
+              </a:spcAft>
+              <a:defRPr sz="2000" b="0">
+                <a:solidFill>
+                  <a:srgbClr val="333333"/>
+                </a:solidFill>
+                <a:latin typeface="Calibri"/>
+              </a:defRPr>
+            </a:pPr>
+            <a:r>
+              <a:t>• Parse command-line arguments using CLP</a:t>
+            </a:r>
+          </a:p>
+          <a:p>
+            <a:pPr>
+              <a:lnSpc>
+                <a:spcPts val="2200"/>
+              </a:lnSpc>
+              <a:spcAft>
+                <a:spcPts val="1000"/>
+              </a:spcAft>
+              <a:defRPr sz="2000" b="0">
+                <a:solidFill>
+                  <a:srgbClr val="333333"/>
+                </a:solidFill>
+                <a:latin typeface="Calibri"/>
+              </a:defRPr>
+            </a:pPr>
+            <a:r>
+              <a:t>• Compare transactions using comparators</a:t>
+            </a:r>
+          </a:p>
+          <a:p>
+            <a:pPr>
+              <a:lnSpc>
+                <a:spcPts val="2200"/>
+              </a:lnSpc>
+              <a:spcAft>
+                <a:spcPts val="1000"/>
+              </a:spcAft>
+              <a:defRPr sz="2000" b="0">
+                <a:solidFill>
+                  <a:srgbClr val="333333"/>
+                </a:solidFill>
+                <a:latin typeface="Calibri"/>
+              </a:defRPr>
+            </a:pPr>
+            <a:r>
+              <a:t>• Record and playback transactions</a:t>
+            </a:r>
+          </a:p>
+          <a:p>
+            <a:pPr>
+              <a:lnSpc>
+                <a:spcPts val="2200"/>
+              </a:lnSpc>
+              <a:spcAft>
+                <a:spcPts val="1000"/>
+              </a:spcAft>
+              <a:defRPr sz="2000" b="0">
+                <a:solidFill>
+                  <a:srgbClr val="333333"/>
+                </a:solidFill>
+                <a:latin typeface="Calibri"/>
+              </a:defRPr>
+            </a:pPr>
+            <a:r>
+              <a:t>• Use pools and queues for memory management</a:t>
+            </a:r>
+          </a:p>
+          <a:p>
+            <a:pPr>
+              <a:lnSpc>
+                <a:spcPts val="2200"/>
+              </a:lnSpc>
+              <a:spcAft>
+                <a:spcPts val="1000"/>
+              </a:spcAft>
+              <a:defRPr sz="2000" b="0">
+                <a:solidFill>
+                  <a:srgbClr val="333333"/>
+                </a:solidFill>
+                <a:latin typeface="Calibri"/>
+              </a:defRPr>
+            </a:pPr>
+            <a:r>
+              <a:t>• Apply string, math, and random utilities</a:t>
+            </a:r>
+          </a:p>
+        </p:txBody>
+      </p:sp>
+      <p:sp>
+        <p:nvSpPr>
+          <p:cNvPr id="4" name="TextBox 3"/>
+          <p:cNvSpPr txBox="1"/>
+          <p:nvPr/>
+        </p:nvSpPr>
+        <p:spPr>
+          <a:xfrm>
+            <a:off x="548640" y="6355080"/>
+            <a:ext cx="11064240" cy="320040"/>
+          </a:xfrm>
+          <a:prstGeom prst="rect">
+            <a:avLst/>
+          </a:prstGeom>
+          <a:noFill/>
+        </p:spPr>
+        <p:txBody>
+          <a:bodyPr wrap="square">
+            <a:noAutofit/>
+          </a:bodyPr>
+          <a:lstStyle/>
+          <a:p>
+            <a:pPr algn="r">
+              <a:lnSpc>
+                <a:spcPts val="2200"/>
+              </a:lnSpc>
+              <a:defRPr sz="1000" b="0">
+                <a:solidFill>
+                  <a:srgbClr val="666666"/>
+                </a:solidFill>
+                <a:latin typeface="Calibri"/>
+              </a:defRPr>
+            </a:pPr>
+            <a:r>
+              <a:t>learn_uvm2017_sv_verilator / Module 8</a:t>
+            </a:r>
+          </a:p>
+        </p:txBody>
+      </p:sp>
+    </p:spTree>
+  </p:cSld>
+  <p:clrMapOvr>
+    <a:masterClrMapping/>
+  </p:clrMapOvr>
+</p:sld>
+</file>
+
+<file path=ppt/slides/slide106.xml><?xml version="1.0" encoding="utf-8"?>
+<p:sld xmlns:a="http://schemas.openxmlformats.org/drawingml/2006/main" xmlns:p="http://schemas.openxmlformats.org/presentationml/2006/main" xmlns:r="http://schemas.openxmlformats.org/officeDocument/2006/relationships">
+  <p:cSld>
+    <p:spTree>
+      <p:nvGrpSpPr>
+        <p:cNvPr id="1" name=""/>
+        <p:cNvGrpSpPr/>
+        <p:nvPr/>
+      </p:nvGrpSpPr>
+      <p:grpSpPr/>
+      <p:sp>
+        <p:nvSpPr>
+          <p:cNvPr id="2" name="TextBox 1"/>
+          <p:cNvSpPr txBox="1"/>
+          <p:nvPr/>
+        </p:nvSpPr>
+        <p:spPr>
+          <a:xfrm>
+            <a:off x="548640" y="411480"/>
+            <a:ext cx="11064240" cy="777240"/>
+          </a:xfrm>
+          <a:prstGeom prst="rect">
+            <a:avLst/>
+          </a:prstGeom>
+          <a:noFill/>
+        </p:spPr>
+        <p:txBody>
+          <a:bodyPr wrap="square">
+            <a:noAutofit/>
+          </a:bodyPr>
+          <a:lstStyle/>
+          <a:p>
+            <a:pPr>
+              <a:lnSpc>
+                <a:spcPts val="2200"/>
+              </a:lnSpc>
+              <a:defRPr sz="2800" b="1">
+                <a:solidFill>
+                  <a:srgbClr val="1A1A2E"/>
+                </a:solidFill>
+                <a:latin typeface="Calibri"/>
+              </a:defRPr>
+            </a:pPr>
+            <a:r>
+              <a:t>What you should know (2/2)</a:t>
+            </a:r>
+          </a:p>
+        </p:txBody>
+      </p:sp>
+      <p:sp>
+        <p:nvSpPr>
+          <p:cNvPr id="3" name="TextBox 2"/>
+          <p:cNvSpPr txBox="1"/>
+          <p:nvPr/>
+        </p:nvSpPr>
+        <p:spPr>
+          <a:xfrm>
+            <a:off x="548640" y="1234440"/>
+            <a:ext cx="11064240" cy="4937760"/>
+          </a:xfrm>
+          <a:prstGeom prst="rect">
+            <a:avLst/>
+          </a:prstGeom>
+          <a:noFill/>
+        </p:spPr>
+        <p:txBody>
+          <a:bodyPr wrap="square">
+            <a:noAutofit/>
+          </a:bodyPr>
+          <a:lstStyle/>
+          <a:p>
+            <a:pPr>
+              <a:lnSpc>
+                <a:spcPts val="2200"/>
+              </a:lnSpc>
+              <a:spcAft>
+                <a:spcPts val="1000"/>
+              </a:spcAft>
+              <a:defRPr sz="2000" b="0">
+                <a:solidFill>
+                  <a:srgbClr val="333333"/>
+                </a:solidFill>
+                <a:latin typeface="Calibri"/>
+              </a:defRPr>
+            </a:pPr>
+            <a:r>
+              <a:t>• Integrate multiple utilities in testbenches</a:t>
+            </a:r>
+          </a:p>
+          <a:p>
+            <a:pPr>
+              <a:lnSpc>
+                <a:spcPts val="2200"/>
+              </a:lnSpc>
+              <a:spcAft>
+                <a:spcPts val="1000"/>
+              </a:spcAft>
+              <a:defRPr sz="2000" b="0">
+                <a:solidFill>
+                  <a:srgbClr val="333333"/>
+                </a:solidFill>
+                <a:latin typeface="Calibri"/>
+              </a:defRPr>
+            </a:pPr>
+            <a:r>
+              <a:t>• Build flexible and configurable testbenches</a:t>
+            </a:r>
+          </a:p>
+          <a:p>
+            <a:pPr>
+              <a:lnSpc>
+                <a:spcPts val="2200"/>
+              </a:lnSpc>
+              <a:spcAft>
+                <a:spcPts val="1000"/>
+              </a:spcAft>
+              <a:defRPr sz="2000" b="0">
+                <a:solidFill>
+                  <a:srgbClr val="333333"/>
+                </a:solidFill>
+                <a:latin typeface="Calibri"/>
+              </a:defRPr>
+            </a:pPr>
+            <a:r>
+              <a:t>• Understand utility method signatures and usage</a:t>
+            </a:r>
+          </a:p>
+          <a:p>
+            <a:pPr>
+              <a:lnSpc>
+                <a:spcPts val="2200"/>
+              </a:lnSpc>
+              <a:spcAft>
+                <a:spcPts val="1000"/>
+              </a:spcAft>
+              <a:defRPr sz="2000" b="0">
+                <a:solidFill>
+                  <a:srgbClr val="333333"/>
+                </a:solidFill>
+                <a:latin typeface="Calibri"/>
+              </a:defRPr>
+            </a:pPr>
+            <a:r>
+              <a:t>      patterns</a:t>
+            </a:r>
+          </a:p>
+          <a:p>
+            <a:pPr>
+              <a:lnSpc>
+                <a:spcPts val="2200"/>
+              </a:lnSpc>
+              <a:spcAft>
+                <a:spcPts val="1000"/>
+              </a:spcAft>
+              <a:defRPr sz="2000" b="0">
+                <a:solidFill>
+                  <a:srgbClr val="333333"/>
+                </a:solidFill>
+                <a:latin typeface="Calibri"/>
+              </a:defRPr>
+            </a:pPr>
+            <a:r>
+              <a:t>• Apply utility patterns in real-world testbenches</a:t>
+            </a:r>
+          </a:p>
+        </p:txBody>
+      </p:sp>
+      <p:sp>
+        <p:nvSpPr>
+          <p:cNvPr id="4" name="TextBox 3"/>
+          <p:cNvSpPr txBox="1"/>
+          <p:nvPr/>
+        </p:nvSpPr>
+        <p:spPr>
+          <a:xfrm>
+            <a:off x="548640" y="6355080"/>
+            <a:ext cx="11064240" cy="320040"/>
+          </a:xfrm>
+          <a:prstGeom prst="rect">
+            <a:avLst/>
+          </a:prstGeom>
+          <a:noFill/>
+        </p:spPr>
+        <p:txBody>
+          <a:bodyPr wrap="square">
+            <a:noAutofit/>
+          </a:bodyPr>
+          <a:lstStyle/>
+          <a:p>
+            <a:pPr algn="r">
+              <a:lnSpc>
+                <a:spcPts val="2200"/>
+              </a:lnSpc>
+              <a:defRPr sz="1000" b="0">
+                <a:solidFill>
+                  <a:srgbClr val="666666"/>
+                </a:solidFill>
+                <a:latin typeface="Calibri"/>
+              </a:defRPr>
+            </a:pPr>
+            <a:r>
+              <a:t>learn_uvm2017_sv_verilator / Module 8</a:t>
+            </a:r>
+          </a:p>
+        </p:txBody>
+      </p:sp>
+    </p:spTree>
+  </p:cSld>
+  <p:clrMapOvr>
+    <a:masterClrMapping/>
+  </p:clrMapOvr>
+</p:sld>
+</file>
+
+<file path=ppt/slides/slide107.xml><?xml version="1.0" encoding="utf-8"?>
+<p:sld xmlns:a="http://schemas.openxmlformats.org/drawingml/2006/main" xmlns:p="http://schemas.openxmlformats.org/presentationml/2006/main" xmlns:r="http://schemas.openxmlformats.org/officeDocument/2006/relationships">
+  <p:cSld>
+    <p:spTree>
+      <p:nvGrpSpPr>
+        <p:cNvPr id="1" name=""/>
+        <p:cNvGrpSpPr/>
+        <p:nvPr/>
+      </p:nvGrpSpPr>
+      <p:grpSpPr/>
+      <p:sp>
+        <p:nvSpPr>
+          <p:cNvPr id="2" name="TextBox 1"/>
+          <p:cNvSpPr txBox="1"/>
+          <p:nvPr/>
+        </p:nvSpPr>
+        <p:spPr>
+          <a:xfrm>
+            <a:off x="548640" y="411480"/>
+            <a:ext cx="11064240" cy="777240"/>
+          </a:xfrm>
+          <a:prstGeom prst="rect">
+            <a:avLst/>
+          </a:prstGeom>
+          <a:noFill/>
+        </p:spPr>
+        <p:txBody>
+          <a:bodyPr wrap="square">
+            <a:noAutofit/>
+          </a:bodyPr>
+          <a:lstStyle/>
+          <a:p>
+            <a:pPr>
+              <a:lnSpc>
+                <a:spcPts val="2200"/>
+              </a:lnSpc>
+              <a:defRPr sz="2800" b="1">
+                <a:solidFill>
+                  <a:srgbClr val="1A1A2E"/>
+                </a:solidFill>
+                <a:latin typeface="Calibri"/>
+              </a:defRPr>
+            </a:pPr>
+            <a:r>
+              <a:t>Exercises</a:t>
+            </a:r>
+          </a:p>
+        </p:txBody>
+      </p:sp>
+      <p:sp>
+        <p:nvSpPr>
+          <p:cNvPr id="3" name="TextBox 2"/>
+          <p:cNvSpPr txBox="1"/>
+          <p:nvPr/>
+        </p:nvSpPr>
+        <p:spPr>
+          <a:xfrm>
+            <a:off x="548640" y="1234440"/>
+            <a:ext cx="11064240" cy="4937760"/>
+          </a:xfrm>
+          <a:prstGeom prst="rect">
+            <a:avLst/>
+          </a:prstGeom>
+          <a:noFill/>
+        </p:spPr>
+        <p:txBody>
+          <a:bodyPr wrap="square">
+            <a:noAutofit/>
+          </a:bodyPr>
+          <a:lstStyle/>
+          <a:p>
+            <a:pPr>
+              <a:lnSpc>
+                <a:spcPts val="2200"/>
+              </a:lnSpc>
+              <a:spcAft>
+                <a:spcPts val="1000"/>
+              </a:spcAft>
+              <a:defRPr sz="2000" b="0">
+                <a:solidFill>
+                  <a:srgbClr val="333333"/>
+                </a:solidFill>
+                <a:latin typeface="Calibri"/>
+              </a:defRPr>
+            </a:pPr>
+            <a:r>
+              <a:t>• Command Line Processor</a:t>
+            </a:r>
+          </a:p>
+          <a:p>
+            <a:pPr>
+              <a:lnSpc>
+                <a:spcPts val="2200"/>
+              </a:lnSpc>
+              <a:spcAft>
+                <a:spcPts val="1000"/>
+              </a:spcAft>
+              <a:defRPr sz="2000" b="0">
+                <a:solidFill>
+                  <a:srgbClr val="333333"/>
+                </a:solidFill>
+                <a:latin typeface="Calibri"/>
+              </a:defRPr>
+            </a:pPr>
+            <a:r>
+              <a:t>• Comparators</a:t>
+            </a:r>
+          </a:p>
+          <a:p>
+            <a:pPr>
+              <a:lnSpc>
+                <a:spcPts val="2200"/>
+              </a:lnSpc>
+              <a:spcAft>
+                <a:spcPts val="1000"/>
+              </a:spcAft>
+              <a:defRPr sz="2000" b="0">
+                <a:solidFill>
+                  <a:srgbClr val="333333"/>
+                </a:solidFill>
+                <a:latin typeface="Calibri"/>
+              </a:defRPr>
+            </a:pPr>
+            <a:r>
+              <a:t>• Recorders</a:t>
+            </a:r>
+          </a:p>
+          <a:p>
+            <a:pPr>
+              <a:lnSpc>
+                <a:spcPts val="2200"/>
+              </a:lnSpc>
+              <a:spcAft>
+                <a:spcPts val="1000"/>
+              </a:spcAft>
+              <a:defRPr sz="2000" b="0">
+                <a:solidFill>
+                  <a:srgbClr val="333333"/>
+                </a:solidFill>
+                <a:latin typeface="Calibri"/>
+              </a:defRPr>
+            </a:pPr>
+            <a:r>
+              <a:t>• Pools</a:t>
+            </a:r>
+          </a:p>
+          <a:p>
+            <a:pPr>
+              <a:lnSpc>
+                <a:spcPts val="2200"/>
+              </a:lnSpc>
+              <a:spcAft>
+                <a:spcPts val="1000"/>
+              </a:spcAft>
+              <a:defRPr sz="2000" b="0">
+                <a:solidFill>
+                  <a:srgbClr val="333333"/>
+                </a:solidFill>
+                <a:latin typeface="Calibri"/>
+              </a:defRPr>
+            </a:pPr>
+            <a:r>
+              <a:t>• Queues</a:t>
+            </a:r>
+          </a:p>
+        </p:txBody>
+      </p:sp>
+      <p:sp>
+        <p:nvSpPr>
+          <p:cNvPr id="4" name="TextBox 3"/>
+          <p:cNvSpPr txBox="1"/>
+          <p:nvPr/>
+        </p:nvSpPr>
+        <p:spPr>
+          <a:xfrm>
+            <a:off x="548640" y="6355080"/>
+            <a:ext cx="11064240" cy="320040"/>
+          </a:xfrm>
+          <a:prstGeom prst="rect">
+            <a:avLst/>
+          </a:prstGeom>
+          <a:noFill/>
+        </p:spPr>
+        <p:txBody>
+          <a:bodyPr wrap="square">
+            <a:noAutofit/>
+          </a:bodyPr>
+          <a:lstStyle/>
+          <a:p>
+            <a:pPr algn="r">
+              <a:lnSpc>
+                <a:spcPts val="2200"/>
+              </a:lnSpc>
+              <a:defRPr sz="1000" b="0">
+                <a:solidFill>
+                  <a:srgbClr val="666666"/>
+                </a:solidFill>
+                <a:latin typeface="Calibri"/>
+              </a:defRPr>
+            </a:pPr>
+            <a:r>
+              <a:t>learn_uvm2017_sv_verilator / Module 8</a:t>
+            </a:r>
+          </a:p>
+        </p:txBody>
+      </p:sp>
+    </p:spTree>
+  </p:cSld>
+  <p:clrMapOvr>
+    <a:masterClrMapping/>
+  </p:clrMapOvr>
+</p:sld>
+</file>
+
+<file path=ppt/slides/slide108.xml><?xml version="1.0" encoding="utf-8"?>
+<p:sld xmlns:a="http://schemas.openxmlformats.org/drawingml/2006/main" xmlns:p="http://schemas.openxmlformats.org/presentationml/2006/main" xmlns:r="http://schemas.openxmlformats.org/officeDocument/2006/relationships">
+  <p:cSld>
+    <p:spTree>
+      <p:nvGrpSpPr>
+        <p:cNvPr id="1" name=""/>
+        <p:cNvGrpSpPr/>
+        <p:nvPr/>
+      </p:nvGrpSpPr>
+      <p:grpSpPr/>
+      <p:sp>
+        <p:nvSpPr>
+          <p:cNvPr id="2" name="TextBox 1"/>
+          <p:cNvSpPr txBox="1"/>
+          <p:nvPr/>
+        </p:nvSpPr>
+        <p:spPr>
+          <a:xfrm>
+            <a:off x="548640" y="411480"/>
+            <a:ext cx="11064240" cy="777240"/>
+          </a:xfrm>
+          <a:prstGeom prst="rect">
+            <a:avLst/>
+          </a:prstGeom>
+          <a:noFill/>
+        </p:spPr>
+        <p:txBody>
+          <a:bodyPr wrap="square">
+            <a:noAutofit/>
+          </a:bodyPr>
+          <a:lstStyle/>
+          <a:p>
+            <a:pPr>
+              <a:lnSpc>
+                <a:spcPts val="2200"/>
+              </a:lnSpc>
+              <a:defRPr sz="2800" b="1">
+                <a:solidFill>
+                  <a:srgbClr val="1A1A2E"/>
+                </a:solidFill>
+                <a:latin typeface="Calibri"/>
+              </a:defRPr>
+            </a:pPr>
+            <a:r>
+              <a:t>Exercises</a:t>
+            </a:r>
+          </a:p>
+        </p:txBody>
+      </p:sp>
+      <p:sp>
+        <p:nvSpPr>
+          <p:cNvPr id="3" name="TextBox 2"/>
+          <p:cNvSpPr txBox="1"/>
+          <p:nvPr/>
+        </p:nvSpPr>
+        <p:spPr>
+          <a:xfrm>
+            <a:off x="548640" y="1234440"/>
+            <a:ext cx="11064240" cy="4937760"/>
+          </a:xfrm>
+          <a:prstGeom prst="rect">
+            <a:avLst/>
+          </a:prstGeom>
+          <a:noFill/>
+        </p:spPr>
+        <p:txBody>
+          <a:bodyPr wrap="square">
+            <a:noAutofit/>
+          </a:bodyPr>
+          <a:lstStyle/>
+          <a:p>
+            <a:pPr>
+              <a:lnSpc>
+                <a:spcPts val="2200"/>
+              </a:lnSpc>
+              <a:spcAft>
+                <a:spcPts val="1000"/>
+              </a:spcAft>
+              <a:defRPr sz="2000" b="0">
+                <a:solidFill>
+                  <a:srgbClr val="333333"/>
+                </a:solidFill>
+                <a:latin typeface="Calibri"/>
+              </a:defRPr>
+            </a:pPr>
+            <a:r>
+              <a:t>• String Utilities</a:t>
+            </a:r>
+          </a:p>
+          <a:p>
+            <a:pPr>
+              <a:lnSpc>
+                <a:spcPts val="2200"/>
+              </a:lnSpc>
+              <a:spcAft>
+                <a:spcPts val="1000"/>
+              </a:spcAft>
+              <a:defRPr sz="2000" b="0">
+                <a:solidFill>
+                  <a:srgbClr val="333333"/>
+                </a:solidFill>
+                <a:latin typeface="Calibri"/>
+              </a:defRPr>
+            </a:pPr>
+            <a:r>
+              <a:t>• Math Utilities</a:t>
+            </a:r>
+          </a:p>
+          <a:p>
+            <a:pPr>
+              <a:lnSpc>
+                <a:spcPts val="2200"/>
+              </a:lnSpc>
+              <a:spcAft>
+                <a:spcPts val="1000"/>
+              </a:spcAft>
+              <a:defRPr sz="2000" b="0">
+                <a:solidFill>
+                  <a:srgbClr val="333333"/>
+                </a:solidFill>
+                <a:latin typeface="Calibri"/>
+              </a:defRPr>
+            </a:pPr>
+            <a:r>
+              <a:t>• Random Utilities</a:t>
+            </a:r>
+          </a:p>
+          <a:p>
+            <a:pPr>
+              <a:lnSpc>
+                <a:spcPts val="2200"/>
+              </a:lnSpc>
+              <a:spcAft>
+                <a:spcPts val="1000"/>
+              </a:spcAft>
+              <a:defRPr sz="2000" b="0">
+                <a:solidFill>
+                  <a:srgbClr val="333333"/>
+                </a:solidFill>
+                <a:latin typeface="Calibri"/>
+              </a:defRPr>
+            </a:pPr>
+            <a:r>
+              <a:t>• Integration</a:t>
+            </a:r>
+          </a:p>
+        </p:txBody>
+      </p:sp>
+      <p:sp>
+        <p:nvSpPr>
+          <p:cNvPr id="4" name="TextBox 3"/>
+          <p:cNvSpPr txBox="1"/>
+          <p:nvPr/>
+        </p:nvSpPr>
+        <p:spPr>
+          <a:xfrm>
+            <a:off x="548640" y="6355080"/>
+            <a:ext cx="11064240" cy="320040"/>
+          </a:xfrm>
+          <a:prstGeom prst="rect">
+            <a:avLst/>
+          </a:prstGeom>
+          <a:noFill/>
+        </p:spPr>
+        <p:txBody>
+          <a:bodyPr wrap="square">
+            <a:noAutofit/>
+          </a:bodyPr>
+          <a:lstStyle/>
+          <a:p>
+            <a:pPr algn="r">
+              <a:lnSpc>
+                <a:spcPts val="2200"/>
+              </a:lnSpc>
+              <a:defRPr sz="1000" b="0">
+                <a:solidFill>
+                  <a:srgbClr val="666666"/>
+                </a:solidFill>
+                <a:latin typeface="Calibri"/>
+              </a:defRPr>
+            </a:pPr>
+            <a:r>
+              <a:t>learn_uvm2017_sv_verilator / Module 8</a:t>
+            </a:r>
+          </a:p>
+        </p:txBody>
+      </p:sp>
+    </p:spTree>
+  </p:cSld>
+  <p:clrMapOvr>
+    <a:masterClrMapping/>
+  </p:clrMapOvr>
+</p:sld>
+</file>
+
+<file path=ppt/slides/slide109.xml><?xml version="1.0" encoding="utf-8"?>
+<p:sld xmlns:a="http://schemas.openxmlformats.org/drawingml/2006/main" xmlns:p="http://schemas.openxmlformats.org/presentationml/2006/main" xmlns:r="http://schemas.openxmlformats.org/officeDocument/2006/relationships">
+  <p:cSld>
+    <p:spTree>
+      <p:nvGrpSpPr>
+        <p:cNvPr id="1" name=""/>
+        <p:cNvGrpSpPr/>
+        <p:nvPr/>
+      </p:nvGrpSpPr>
+      <p:grpSpPr/>
+      <p:sp>
+        <p:nvSpPr>
+          <p:cNvPr id="2" name="TextBox 1"/>
+          <p:cNvSpPr txBox="1"/>
+          <p:nvPr/>
+        </p:nvSpPr>
+        <p:spPr>
+          <a:xfrm>
+            <a:off x="548640" y="411480"/>
+            <a:ext cx="11064240" cy="777240"/>
+          </a:xfrm>
+          <a:prstGeom prst="rect">
+            <a:avLst/>
+          </a:prstGeom>
+          <a:noFill/>
+        </p:spPr>
+        <p:txBody>
+          <a:bodyPr wrap="square">
+            <a:noAutofit/>
+          </a:bodyPr>
+          <a:lstStyle/>
+          <a:p>
+            <a:pPr>
+              <a:lnSpc>
+                <a:spcPts val="2200"/>
+              </a:lnSpc>
+              <a:defRPr sz="2800" b="1">
+                <a:solidFill>
+                  <a:srgbClr val="1A1A2E"/>
+                </a:solidFill>
+                <a:latin typeface="Calibri"/>
+              </a:defRPr>
+            </a:pPr>
+            <a:r>
+              <a:t>Assessment checklist</a:t>
+            </a:r>
+          </a:p>
+        </p:txBody>
+      </p:sp>
+      <p:sp>
+        <p:nvSpPr>
+          <p:cNvPr id="3" name="TextBox 2"/>
+          <p:cNvSpPr txBox="1"/>
+          <p:nvPr/>
+        </p:nvSpPr>
+        <p:spPr>
+          <a:xfrm>
+            <a:off x="548640" y="1234440"/>
+            <a:ext cx="11064240" cy="4937760"/>
+          </a:xfrm>
+          <a:prstGeom prst="rect">
+            <a:avLst/>
+          </a:prstGeom>
+          <a:noFill/>
+        </p:spPr>
+        <p:txBody>
+          <a:bodyPr wrap="square">
+            <a:noAutofit/>
+          </a:bodyPr>
+          <a:lstStyle/>
+          <a:p>
+            <a:pPr>
+              <a:lnSpc>
+                <a:spcPts val="2200"/>
+              </a:lnSpc>
+              <a:spcAft>
+                <a:spcPts val="1000"/>
+              </a:spcAft>
+              <a:defRPr sz="2000" b="0">
+                <a:solidFill>
+                  <a:srgbClr val="333333"/>
+                </a:solidFill>
+                <a:latin typeface="Calibri"/>
+              </a:defRPr>
+            </a:pPr>
+            <a:r>
+              <a:t>• Can use UVM utility classes effectively</a:t>
+            </a:r>
+          </a:p>
+          <a:p>
+            <a:pPr>
+              <a:lnSpc>
+                <a:spcPts val="2200"/>
+              </a:lnSpc>
+              <a:spcAft>
+                <a:spcPts val="1000"/>
+              </a:spcAft>
+              <a:defRPr sz="2000" b="0">
+                <a:solidFill>
+                  <a:srgbClr val="333333"/>
+                </a:solidFill>
+                <a:latin typeface="Calibri"/>
+              </a:defRPr>
+            </a:pPr>
+            <a:r>
+              <a:t>• Can parse command-line arguments using CLP</a:t>
+            </a:r>
+          </a:p>
+          <a:p>
+            <a:pPr>
+              <a:lnSpc>
+                <a:spcPts val="2200"/>
+              </a:lnSpc>
+              <a:spcAft>
+                <a:spcPts val="1000"/>
+              </a:spcAft>
+              <a:defRPr sz="2000" b="0">
+                <a:solidFill>
+                  <a:srgbClr val="333333"/>
+                </a:solidFill>
+                <a:latin typeface="Calibri"/>
+              </a:defRPr>
+            </a:pPr>
+            <a:r>
+              <a:t>• Can compare transactions using comparators</a:t>
+            </a:r>
+          </a:p>
+          <a:p>
+            <a:pPr>
+              <a:lnSpc>
+                <a:spcPts val="2200"/>
+              </a:lnSpc>
+              <a:spcAft>
+                <a:spcPts val="1000"/>
+              </a:spcAft>
+              <a:defRPr sz="2000" b="0">
+                <a:solidFill>
+                  <a:srgbClr val="333333"/>
+                </a:solidFill>
+                <a:latin typeface="Calibri"/>
+              </a:defRPr>
+            </a:pPr>
+            <a:r>
+              <a:t>• Can record and playback transactions</a:t>
+            </a:r>
+          </a:p>
+          <a:p>
+            <a:pPr>
+              <a:lnSpc>
+                <a:spcPts val="2200"/>
+              </a:lnSpc>
+              <a:spcAft>
+                <a:spcPts val="1000"/>
+              </a:spcAft>
+              <a:defRPr sz="2000" b="0">
+                <a:solidFill>
+                  <a:srgbClr val="333333"/>
+                </a:solidFill>
+                <a:latin typeface="Calibri"/>
+              </a:defRPr>
+            </a:pPr>
+            <a:r>
+              <a:t>• Can use pools and queues for memory management</a:t>
+            </a:r>
+          </a:p>
+          <a:p>
+            <a:pPr>
+              <a:lnSpc>
+                <a:spcPts val="2200"/>
+              </a:lnSpc>
+              <a:spcAft>
+                <a:spcPts val="1000"/>
+              </a:spcAft>
+              <a:defRPr sz="2000" b="0">
+                <a:solidFill>
+                  <a:srgbClr val="333333"/>
+                </a:solidFill>
+                <a:latin typeface="Calibri"/>
+              </a:defRPr>
+            </a:pPr>
+            <a:r>
+              <a:t>• Can apply string, math, and random utilities</a:t>
+            </a:r>
+          </a:p>
+        </p:txBody>
+      </p:sp>
+      <p:sp>
+        <p:nvSpPr>
+          <p:cNvPr id="4" name="TextBox 3"/>
+          <p:cNvSpPr txBox="1"/>
+          <p:nvPr/>
+        </p:nvSpPr>
+        <p:spPr>
+          <a:xfrm>
+            <a:off x="548640" y="6355080"/>
+            <a:ext cx="11064240" cy="320040"/>
+          </a:xfrm>
+          <a:prstGeom prst="rect">
+            <a:avLst/>
+          </a:prstGeom>
+          <a:noFill/>
+        </p:spPr>
+        <p:txBody>
+          <a:bodyPr wrap="square">
+            <a:noAutofit/>
+          </a:bodyPr>
+          <a:lstStyle/>
+          <a:p>
+            <a:pPr algn="r">
+              <a:lnSpc>
+                <a:spcPts val="2200"/>
+              </a:lnSpc>
+              <a:defRPr sz="1000" b="0">
+                <a:solidFill>
+                  <a:srgbClr val="666666"/>
+                </a:solidFill>
+                <a:latin typeface="Calibri"/>
+              </a:defRPr>
+            </a:pPr>
+            <a:r>
+              <a:t>learn_uvm2017_sv_verilator / Module 8</a:t>
+            </a:r>
+          </a:p>
+        </p:txBody>
+      </p:sp>
+    </p:spTree>
+  </p:cSld>
+  <p:clrMapOvr>
+    <a:masterClrMapping/>
+  </p:clrMapOvr>
+</p:sld>
+</file>
+
 <file path=ppt/slides/slide11.xml><?xml version="1.0" encoding="utf-8"?>
 <p:sld xmlns:a="http://schemas.openxmlformats.org/drawingml/2006/main" xmlns:p="http://schemas.openxmlformats.org/presentationml/2006/main" xmlns:r="http://schemas.openxmlformats.org/officeDocument/2006/relationships">
   <p:cSld>
@@ -9681,6 +12947,201 @@
             </a:pPr>
             <a:r>
               <a:t>• Test configuration from command line</a:t>
+            </a:r>
+          </a:p>
+        </p:txBody>
+      </p:sp>
+      <p:sp>
+        <p:nvSpPr>
+          <p:cNvPr id="4" name="TextBox 3"/>
+          <p:cNvSpPr txBox="1"/>
+          <p:nvPr/>
+        </p:nvSpPr>
+        <p:spPr>
+          <a:xfrm>
+            <a:off x="548640" y="6355080"/>
+            <a:ext cx="11064240" cy="320040"/>
+          </a:xfrm>
+          <a:prstGeom prst="rect">
+            <a:avLst/>
+          </a:prstGeom>
+          <a:noFill/>
+        </p:spPr>
+        <p:txBody>
+          <a:bodyPr wrap="square">
+            <a:noAutofit/>
+          </a:bodyPr>
+          <a:lstStyle/>
+          <a:p>
+            <a:pPr algn="r">
+              <a:lnSpc>
+                <a:spcPts val="2200"/>
+              </a:lnSpc>
+              <a:defRPr sz="1000" b="0">
+                <a:solidFill>
+                  <a:srgbClr val="666666"/>
+                </a:solidFill>
+                <a:latin typeface="Calibri"/>
+              </a:defRPr>
+            </a:pPr>
+            <a:r>
+              <a:t>learn_uvm2017_sv_verilator / Module 8</a:t>
+            </a:r>
+          </a:p>
+        </p:txBody>
+      </p:sp>
+    </p:spTree>
+  </p:cSld>
+  <p:clrMapOvr>
+    <a:masterClrMapping/>
+  </p:clrMapOvr>
+</p:sld>
+</file>
+
+<file path=ppt/slides/slide110.xml><?xml version="1.0" encoding="utf-8"?>
+<p:sld xmlns:a="http://schemas.openxmlformats.org/drawingml/2006/main" xmlns:p="http://schemas.openxmlformats.org/presentationml/2006/main" xmlns:r="http://schemas.openxmlformats.org/officeDocument/2006/relationships">
+  <p:cSld>
+    <p:spTree>
+      <p:nvGrpSpPr>
+        <p:cNvPr id="1" name=""/>
+        <p:cNvGrpSpPr/>
+        <p:nvPr/>
+      </p:nvGrpSpPr>
+      <p:grpSpPr/>
+      <p:sp>
+        <p:nvSpPr>
+          <p:cNvPr id="2" name="TextBox 1"/>
+          <p:cNvSpPr txBox="1"/>
+          <p:nvPr/>
+        </p:nvSpPr>
+        <p:spPr>
+          <a:xfrm>
+            <a:off x="548640" y="411480"/>
+            <a:ext cx="11064240" cy="777240"/>
+          </a:xfrm>
+          <a:prstGeom prst="rect">
+            <a:avLst/>
+          </a:prstGeom>
+          <a:noFill/>
+        </p:spPr>
+        <p:txBody>
+          <a:bodyPr wrap="square">
+            <a:noAutofit/>
+          </a:bodyPr>
+          <a:lstStyle/>
+          <a:p>
+            <a:pPr>
+              <a:lnSpc>
+                <a:spcPts val="2200"/>
+              </a:lnSpc>
+              <a:defRPr sz="2800" b="1">
+                <a:solidFill>
+                  <a:srgbClr val="1A1A2E"/>
+                </a:solidFill>
+                <a:latin typeface="Calibri"/>
+              </a:defRPr>
+            </a:pPr>
+            <a:r>
+              <a:t>Summary &amp; next steps</a:t>
+            </a:r>
+          </a:p>
+        </p:txBody>
+      </p:sp>
+      <p:sp>
+        <p:nvSpPr>
+          <p:cNvPr id="3" name="TextBox 2"/>
+          <p:cNvSpPr txBox="1"/>
+          <p:nvPr/>
+        </p:nvSpPr>
+        <p:spPr>
+          <a:xfrm>
+            <a:off x="548640" y="1234440"/>
+            <a:ext cx="11064240" cy="4937760"/>
+          </a:xfrm>
+          <a:prstGeom prst="rect">
+            <a:avLst/>
+          </a:prstGeom>
+          <a:noFill/>
+        </p:spPr>
+        <p:txBody>
+          <a:bodyPr wrap="square">
+            <a:noAutofit/>
+          </a:bodyPr>
+          <a:lstStyle/>
+          <a:p>
+            <a:pPr>
+              <a:lnSpc>
+                <a:spcPts val="2200"/>
+              </a:lnSpc>
+              <a:spcAft>
+                <a:spcPts val="1000"/>
+              </a:spcAft>
+              <a:defRPr sz="2000" b="0">
+                <a:solidFill>
+                  <a:srgbClr val="333333"/>
+                </a:solidFill>
+                <a:latin typeface="Calibri"/>
+              </a:defRPr>
+            </a:pPr>
+            <a:r>
+              <a:t>• Master UVM utility classes</a:t>
+            </a:r>
+          </a:p>
+          <a:p>
+            <a:pPr>
+              <a:lnSpc>
+                <a:spcPts val="2200"/>
+              </a:lnSpc>
+              <a:spcAft>
+                <a:spcPts val="1000"/>
+              </a:spcAft>
+              <a:defRPr sz="2000" b="0">
+                <a:solidFill>
+                  <a:srgbClr val="333333"/>
+                </a:solidFill>
+                <a:latin typeface="Calibri"/>
+              </a:defRPr>
+            </a:pPr>
+            <a:r>
+              <a:t>• Complete module8/CHECKLIST.md</a:t>
+            </a:r>
+          </a:p>
+          <a:p>
+            <a:pPr>
+              <a:lnSpc>
+                <a:spcPts val="2200"/>
+              </a:lnSpc>
+              <a:spcAft>
+                <a:spcPts val="1000"/>
+              </a:spcAft>
+              <a:defRPr sz="2000" b="0">
+                <a:solidFill>
+                  <a:srgbClr val="333333"/>
+                </a:solidFill>
+                <a:latin typeface="Calibri"/>
+              </a:defRPr>
+            </a:pPr>
+            <a:r>
+              <a:t>• Review module8/EXAMPLES.md and run each lab</a:t>
+            </a:r>
+          </a:p>
+          <a:p>
+            <a:pPr>
+              <a:lnSpc>
+                <a:spcPts val="2200"/>
+              </a:lnSpc>
+              <a:spcAft>
+                <a:spcPts val="1000"/>
+              </a:spcAft>
+              <a:defRPr sz="2000" b="0">
+                <a:solidFill>
+                  <a:srgbClr val="333333"/>
+                </a:solidFill>
+                <a:latin typeface="Calibri"/>
+              </a:defRPr>
+            </a:pPr>
+            <a:r>
+              <a:t>• Next: Next module in course</a:t>
             </a:r>
           </a:p>
         </p:txBody>
@@ -29765,7 +33226,7 @@
               </a:defRPr>
             </a:pPr>
             <a:r>
-              <a:t>$ ./scripts/module8.sh --check</a:t>
+              <a:t>$ ./scripts/module8.sh --clp</a:t>
             </a:r>
           </a:p>
         </p:txBody>
@@ -29859,8 +33320,8 @@
         </p:nvSpPr>
         <p:spPr>
           <a:xfrm>
-            <a:off x="548640" y="2743200"/>
-            <a:ext cx="11064240" cy="1371600"/>
+            <a:off x="548640" y="411480"/>
+            <a:ext cx="11064240" cy="777240"/>
           </a:xfrm>
           <a:prstGeom prst="rect">
             <a:avLst/>
@@ -29873,11 +33334,11 @@
           </a:bodyPr>
           <a:lstStyle/>
           <a:p>
-            <a:pPr algn="ctr">
-              <a:lnSpc>
-                <a:spcPts val="2200"/>
-              </a:lnSpc>
-              <a:defRPr sz="3600" b="1">
+            <a:pPr>
+              <a:lnSpc>
+                <a:spcPts val="2200"/>
+              </a:lnSpc>
+              <a:defRPr sz="2800" b="1">
                 <a:solidFill>
                   <a:srgbClr val="1A1A2E"/>
                 </a:solidFill>
@@ -29885,7 +33346,7 @@
               </a:defRPr>
             </a:pPr>
             <a:r>
-              <a:t>Practice &amp; assessment</a:t>
+              <a:t>Example 1: Command Line Processor</a:t>
             </a:r>
           </a:p>
         </p:txBody>
@@ -29893,6 +33354,124 @@
       <p:sp>
         <p:nvSpPr>
           <p:cNvPr id="3" name="TextBox 2"/>
+          <p:cNvSpPr txBox="1"/>
+          <p:nvPr/>
+        </p:nvSpPr>
+        <p:spPr>
+          <a:xfrm>
+            <a:off x="548640" y="1234440"/>
+            <a:ext cx="11064240" cy="4937760"/>
+          </a:xfrm>
+          <a:prstGeom prst="rect">
+            <a:avLst/>
+          </a:prstGeom>
+          <a:noFill/>
+        </p:spPr>
+        <p:txBody>
+          <a:bodyPr wrap="square">
+            <a:noAutofit/>
+          </a:bodyPr>
+          <a:lstStyle/>
+          <a:p>
+            <a:pPr>
+              <a:lnSpc>
+                <a:spcPts val="2200"/>
+              </a:lnSpc>
+              <a:spcAft>
+                <a:spcPts val="1000"/>
+              </a:spcAft>
+              <a:defRPr sz="2000" b="0">
+                <a:solidFill>
+                  <a:srgbClr val="333333"/>
+                </a:solidFill>
+                <a:latin typeface="Calibri"/>
+              </a:defRPr>
+            </a:pPr>
+            <a:r>
+              <a:t>• CLPTransaction: Transaction with data and address</a:t>
+            </a:r>
+          </a:p>
+          <a:p>
+            <a:pPr>
+              <a:lnSpc>
+                <a:spcPts val="2200"/>
+              </a:lnSpc>
+              <a:spcAft>
+                <a:spcPts val="1000"/>
+              </a:spcAft>
+              <a:defRPr sz="2000" b="0">
+                <a:solidFill>
+                  <a:srgbClr val="333333"/>
+                </a:solidFill>
+                <a:latin typeface="Calibri"/>
+              </a:defRPr>
+            </a:pPr>
+            <a:r>
+              <a:t>      fields</a:t>
+            </a:r>
+          </a:p>
+          <a:p>
+            <a:pPr>
+              <a:lnSpc>
+                <a:spcPts val="2200"/>
+              </a:lnSpc>
+              <a:spcAft>
+                <a:spcPts val="1000"/>
+              </a:spcAft>
+              <a:defRPr sz="2000" b="0">
+                <a:solidFill>
+                  <a:srgbClr val="333333"/>
+                </a:solidFill>
+                <a:latin typeface="Calibri"/>
+              </a:defRPr>
+            </a:pPr>
+            <a:r>
+              <a:t>• CLPSequence: Sequence using CLP configuration for</a:t>
+            </a:r>
+          </a:p>
+          <a:p>
+            <a:pPr>
+              <a:lnSpc>
+                <a:spcPts val="2200"/>
+              </a:lnSpc>
+              <a:spcAft>
+                <a:spcPts val="1000"/>
+              </a:spcAft>
+              <a:defRPr sz="2000" b="0">
+                <a:solidFill>
+                  <a:srgbClr val="333333"/>
+                </a:solidFill>
+                <a:latin typeface="Calibri"/>
+              </a:defRPr>
+            </a:pPr>
+            <a:r>
+              <a:t>      number of transactions</a:t>
+            </a:r>
+          </a:p>
+          <a:p>
+            <a:pPr>
+              <a:lnSpc>
+                <a:spcPts val="2200"/>
+              </a:lnSpc>
+              <a:spcAft>
+                <a:spcPts val="1000"/>
+              </a:spcAft>
+              <a:defRPr sz="2000" b="0">
+                <a:solidFill>
+                  <a:srgbClr val="333333"/>
+                </a:solidFill>
+                <a:latin typeface="Calibri"/>
+              </a:defRPr>
+            </a:pPr>
+            <a:r>
+              <a:t>• CLPDriver: Driver that processes transactions</a:t>
+            </a:r>
+          </a:p>
+        </p:txBody>
+      </p:sp>
+      <p:sp>
+        <p:nvSpPr>
+          <p:cNvPr id="4" name="TextBox 3"/>
           <p:cNvSpPr txBox="1"/>
           <p:nvPr/>
         </p:nvSpPr>
@@ -29981,7 +33560,7 @@
               </a:defRPr>
             </a:pPr>
             <a:r>
-              <a:t>Exercises</a:t>
+              <a:t>Demo: Command Line Processor</a:t>
             </a:r>
           </a:p>
         </p:txBody>
@@ -29994,13 +33573,15 @@
         </p:nvSpPr>
         <p:spPr>
           <a:xfrm>
-            <a:off x="548640" y="1234440"/>
-            <a:ext cx="11064240" cy="4937760"/>
+            <a:off x="548640" y="1051560"/>
+            <a:ext cx="11064240" cy="914400"/>
           </a:xfrm>
           <a:prstGeom prst="rect">
             <a:avLst/>
           </a:prstGeom>
-          <a:noFill/>
+          <a:solidFill>
+            <a:srgbClr val="F4F4F4"/>
+          </a:solidFill>
         </p:spPr>
         <p:txBody>
           <a:bodyPr wrap="square">
@@ -30013,100 +33594,48 @@
                 <a:spcPts val="2200"/>
               </a:lnSpc>
               <a:spcAft>
-                <a:spcPts val="1000"/>
-              </a:spcAft>
-              <a:defRPr sz="2000" b="0">
-                <a:solidFill>
-                  <a:srgbClr val="333333"/>
-                </a:solidFill>
-                <a:latin typeface="Calibri"/>
-              </a:defRPr>
-            </a:pPr>
-            <a:r>
-              <a:t>• Command Line Processor</a:t>
-            </a:r>
-          </a:p>
-          <a:p>
-            <a:pPr>
-              <a:lnSpc>
-                <a:spcPts val="2200"/>
-              </a:lnSpc>
-              <a:spcAft>
-                <a:spcPts val="1000"/>
-              </a:spcAft>
-              <a:defRPr sz="2000" b="0">
-                <a:solidFill>
-                  <a:srgbClr val="333333"/>
-                </a:solidFill>
-                <a:latin typeface="Calibri"/>
-              </a:defRPr>
-            </a:pPr>
-            <a:r>
-              <a:t>• Comparators</a:t>
-            </a:r>
-          </a:p>
-          <a:p>
-            <a:pPr>
-              <a:lnSpc>
-                <a:spcPts val="2200"/>
-              </a:lnSpc>
-              <a:spcAft>
-                <a:spcPts val="1000"/>
-              </a:spcAft>
-              <a:defRPr sz="2000" b="0">
-                <a:solidFill>
-                  <a:srgbClr val="333333"/>
-                </a:solidFill>
-                <a:latin typeface="Calibri"/>
-              </a:defRPr>
-            </a:pPr>
-            <a:r>
-              <a:t>• Recorders</a:t>
-            </a:r>
-          </a:p>
-          <a:p>
-            <a:pPr>
-              <a:lnSpc>
-                <a:spcPts val="2200"/>
-              </a:lnSpc>
-              <a:spcAft>
-                <a:spcPts val="1000"/>
-              </a:spcAft>
-              <a:defRPr sz="2000" b="0">
-                <a:solidFill>
-                  <a:srgbClr val="333333"/>
-                </a:solidFill>
-                <a:latin typeface="Calibri"/>
-              </a:defRPr>
-            </a:pPr>
-            <a:r>
-              <a:t>• Pools</a:t>
-            </a:r>
-          </a:p>
-          <a:p>
-            <a:pPr>
-              <a:lnSpc>
-                <a:spcPts val="2200"/>
-              </a:lnSpc>
-              <a:spcAft>
-                <a:spcPts val="1000"/>
-              </a:spcAft>
-              <a:defRPr sz="2000" b="0">
-                <a:solidFill>
-                  <a:srgbClr val="333333"/>
-                </a:solidFill>
-                <a:latin typeface="Calibri"/>
-              </a:defRPr>
-            </a:pPr>
-            <a:r>
-              <a:t>• Queues</a:t>
-            </a:r>
-          </a:p>
-        </p:txBody>
-      </p:sp>
-      <p:sp>
-        <p:nvSpPr>
-          <p:cNvPr id="4" name="TextBox 3"/>
+                <a:spcPts val="200"/>
+              </a:spcAft>
+              <a:defRPr sz="2000" b="0">
+                <a:solidFill>
+                  <a:srgbClr val="333333"/>
+                </a:solidFill>
+                <a:latin typeface="Consolas"/>
+              </a:defRPr>
+            </a:pPr>
+            <a:r>
+              <a:t>$ ./scripts/module8.sh --clp</a:t>
+            </a:r>
+          </a:p>
+        </p:txBody>
+      </p:sp>
+      <p:pic>
+        <p:nvPicPr>
+          <p:cNvPr id="4" name="Picture 3" descr="ex01_clp.png"/>
+          <p:cNvPicPr>
+            <a:picLocks noChangeAspect="1"/>
+          </p:cNvPicPr>
+          <p:nvPr/>
+        </p:nvPicPr>
+        <p:blipFill>
+          <a:blip r:embed="rId2"/>
+          <a:stretch>
+            <a:fillRect/>
+          </a:stretch>
+        </p:blipFill>
+        <p:spPr>
+          <a:xfrm>
+            <a:off x="548640" y="1965960"/>
+            <a:ext cx="7071358" cy="3977639"/>
+          </a:xfrm>
+          <a:prstGeom prst="rect">
+            <a:avLst/>
+          </a:prstGeom>
+        </p:spPr>
+      </p:pic>
+      <p:sp>
+        <p:nvSpPr>
+          <p:cNvPr id="5" name="TextBox 4"/>
           <p:cNvSpPr txBox="1"/>
           <p:nvPr/>
         </p:nvSpPr>
@@ -30195,7 +33724,7 @@
               </a:defRPr>
             </a:pPr>
             <a:r>
-              <a:t>Exercises</a:t>
+              <a:t>Example 2: Comparators</a:t>
             </a:r>
           </a:p>
         </p:txBody>
@@ -30237,64 +33766,83 @@
               </a:defRPr>
             </a:pPr>
             <a:r>
-              <a:t>• String Utilities</a:t>
-            </a:r>
-          </a:p>
-          <a:p>
-            <a:pPr>
-              <a:lnSpc>
-                <a:spcPts val="2200"/>
-              </a:lnSpc>
-              <a:spcAft>
-                <a:spcPts val="1000"/>
-              </a:spcAft>
-              <a:defRPr sz="2000" b="0">
-                <a:solidFill>
-                  <a:srgbClr val="333333"/>
-                </a:solidFill>
-                <a:latin typeface="Calibri"/>
-              </a:defRPr>
-            </a:pPr>
-            <a:r>
-              <a:t>• Math Utilities</a:t>
-            </a:r>
-          </a:p>
-          <a:p>
-            <a:pPr>
-              <a:lnSpc>
-                <a:spcPts val="2200"/>
-              </a:lnSpc>
-              <a:spcAft>
-                <a:spcPts val="1000"/>
-              </a:spcAft>
-              <a:defRPr sz="2000" b="0">
-                <a:solidFill>
-                  <a:srgbClr val="333333"/>
-                </a:solidFill>
-                <a:latin typeface="Calibri"/>
-              </a:defRPr>
-            </a:pPr>
-            <a:r>
-              <a:t>• Random Utilities</a:t>
-            </a:r>
-          </a:p>
-          <a:p>
-            <a:pPr>
-              <a:lnSpc>
-                <a:spcPts val="2200"/>
-              </a:lnSpc>
-              <a:spcAft>
-                <a:spcPts val="1000"/>
-              </a:spcAft>
-              <a:defRPr sz="2000" b="0">
-                <a:solidFill>
-                  <a:srgbClr val="333333"/>
-                </a:solidFill>
-                <a:latin typeface="Calibri"/>
-              </a:defRPr>
-            </a:pPr>
-            <a:r>
-              <a:t>• Integration</a:t>
+              <a:t>• ComparatorTransaction: Transaction with data,</a:t>
+            </a:r>
+          </a:p>
+          <a:p>
+            <a:pPr>
+              <a:lnSpc>
+                <a:spcPts val="2200"/>
+              </a:lnSpc>
+              <a:spcAft>
+                <a:spcPts val="1000"/>
+              </a:spcAft>
+              <a:defRPr sz="2000" b="0">
+                <a:solidFill>
+                  <a:srgbClr val="333333"/>
+                </a:solidFill>
+                <a:latin typeface="Calibri"/>
+              </a:defRPr>
+            </a:pPr>
+            <a:r>
+              <a:t>      address, and timestamp</a:t>
+            </a:r>
+          </a:p>
+          <a:p>
+            <a:pPr>
+              <a:lnSpc>
+                <a:spcPts val="2200"/>
+              </a:lnSpc>
+              <a:spcAft>
+                <a:spcPts val="1000"/>
+              </a:spcAft>
+              <a:defRPr sz="2000" b="0">
+                <a:solidFill>
+                  <a:srgbClr val="333333"/>
+                </a:solidFill>
+                <a:latin typeface="Calibri"/>
+              </a:defRPr>
+            </a:pPr>
+            <a:r>
+              <a:t>• InOrderComparator: Sequential transaction comparison</a:t>
+            </a:r>
+          </a:p>
+          <a:p>
+            <a:pPr>
+              <a:lnSpc>
+                <a:spcPts val="2200"/>
+              </a:lnSpc>
+              <a:spcAft>
+                <a:spcPts val="1000"/>
+              </a:spcAft>
+              <a:defRPr sz="2000" b="0">
+                <a:solidFill>
+                  <a:srgbClr val="333333"/>
+                </a:solidFill>
+                <a:latin typeface="Calibri"/>
+              </a:defRPr>
+            </a:pPr>
+            <a:r>
+              <a:t>• OutOfOrderComparator: Address-based transaction</a:t>
+            </a:r>
+          </a:p>
+          <a:p>
+            <a:pPr>
+              <a:lnSpc>
+                <a:spcPts val="2200"/>
+              </a:lnSpc>
+              <a:spcAft>
+                <a:spcPts val="1000"/>
+              </a:spcAft>
+              <a:defRPr sz="2000" b="0">
+                <a:solidFill>
+                  <a:srgbClr val="333333"/>
+                </a:solidFill>
+                <a:latin typeface="Calibri"/>
+              </a:defRPr>
+            </a:pPr>
+            <a:r>
+              <a:t>      matching</a:t>
             </a:r>
           </a:p>
         </p:txBody>
@@ -30390,7 +33938,7 @@
               </a:defRPr>
             </a:pPr>
             <a:r>
-              <a:t>Assessment checklist</a:t>
+              <a:t>Demo: Comparators</a:t>
             </a:r>
           </a:p>
         </p:txBody>
@@ -30403,13 +33951,15 @@
         </p:nvSpPr>
         <p:spPr>
           <a:xfrm>
-            <a:off x="548640" y="1234440"/>
-            <a:ext cx="11064240" cy="4937760"/>
+            <a:off x="548640" y="1051560"/>
+            <a:ext cx="11064240" cy="914400"/>
           </a:xfrm>
           <a:prstGeom prst="rect">
             <a:avLst/>
           </a:prstGeom>
-          <a:noFill/>
+          <a:solidFill>
+            <a:srgbClr val="F4F4F4"/>
+          </a:solidFill>
         </p:spPr>
         <p:txBody>
           <a:bodyPr wrap="square">
@@ -30422,119 +33972,48 @@
                 <a:spcPts val="2200"/>
               </a:lnSpc>
               <a:spcAft>
-                <a:spcPts val="1000"/>
-              </a:spcAft>
-              <a:defRPr sz="2000" b="0">
-                <a:solidFill>
-                  <a:srgbClr val="333333"/>
-                </a:solidFill>
-                <a:latin typeface="Calibri"/>
-              </a:defRPr>
-            </a:pPr>
-            <a:r>
-              <a:t>• Can use UVM utility classes effectively</a:t>
-            </a:r>
-          </a:p>
-          <a:p>
-            <a:pPr>
-              <a:lnSpc>
-                <a:spcPts val="2200"/>
-              </a:lnSpc>
-              <a:spcAft>
-                <a:spcPts val="1000"/>
-              </a:spcAft>
-              <a:defRPr sz="2000" b="0">
-                <a:solidFill>
-                  <a:srgbClr val="333333"/>
-                </a:solidFill>
-                <a:latin typeface="Calibri"/>
-              </a:defRPr>
-            </a:pPr>
-            <a:r>
-              <a:t>• Can parse command-line arguments using CLP</a:t>
-            </a:r>
-          </a:p>
-          <a:p>
-            <a:pPr>
-              <a:lnSpc>
-                <a:spcPts val="2200"/>
-              </a:lnSpc>
-              <a:spcAft>
-                <a:spcPts val="1000"/>
-              </a:spcAft>
-              <a:defRPr sz="2000" b="0">
-                <a:solidFill>
-                  <a:srgbClr val="333333"/>
-                </a:solidFill>
-                <a:latin typeface="Calibri"/>
-              </a:defRPr>
-            </a:pPr>
-            <a:r>
-              <a:t>• Can compare transactions using comparators</a:t>
-            </a:r>
-          </a:p>
-          <a:p>
-            <a:pPr>
-              <a:lnSpc>
-                <a:spcPts val="2200"/>
-              </a:lnSpc>
-              <a:spcAft>
-                <a:spcPts val="1000"/>
-              </a:spcAft>
-              <a:defRPr sz="2000" b="0">
-                <a:solidFill>
-                  <a:srgbClr val="333333"/>
-                </a:solidFill>
-                <a:latin typeface="Calibri"/>
-              </a:defRPr>
-            </a:pPr>
-            <a:r>
-              <a:t>• Can record and playback transactions</a:t>
-            </a:r>
-          </a:p>
-          <a:p>
-            <a:pPr>
-              <a:lnSpc>
-                <a:spcPts val="2200"/>
-              </a:lnSpc>
-              <a:spcAft>
-                <a:spcPts val="1000"/>
-              </a:spcAft>
-              <a:defRPr sz="2000" b="0">
-                <a:solidFill>
-                  <a:srgbClr val="333333"/>
-                </a:solidFill>
-                <a:latin typeface="Calibri"/>
-              </a:defRPr>
-            </a:pPr>
-            <a:r>
-              <a:t>• Can use pools and queues for memory management</a:t>
-            </a:r>
-          </a:p>
-          <a:p>
-            <a:pPr>
-              <a:lnSpc>
-                <a:spcPts val="2200"/>
-              </a:lnSpc>
-              <a:spcAft>
-                <a:spcPts val="1000"/>
-              </a:spcAft>
-              <a:defRPr sz="2000" b="0">
-                <a:solidFill>
-                  <a:srgbClr val="333333"/>
-                </a:solidFill>
-                <a:latin typeface="Calibri"/>
-              </a:defRPr>
-            </a:pPr>
-            <a:r>
-              <a:t>• Can apply string, math, and random utilities</a:t>
-            </a:r>
-          </a:p>
-        </p:txBody>
-      </p:sp>
-      <p:sp>
-        <p:nvSpPr>
-          <p:cNvPr id="4" name="TextBox 3"/>
+                <a:spcPts val="200"/>
+              </a:spcAft>
+              <a:defRPr sz="2000" b="0">
+                <a:solidFill>
+                  <a:srgbClr val="333333"/>
+                </a:solidFill>
+                <a:latin typeface="Consolas"/>
+              </a:defRPr>
+            </a:pPr>
+            <a:r>
+              <a:t>$ ./scripts/module8.sh --comparators</a:t>
+            </a:r>
+          </a:p>
+        </p:txBody>
+      </p:sp>
+      <p:pic>
+        <p:nvPicPr>
+          <p:cNvPr id="4" name="Picture 3" descr="ex02_comparators.png"/>
+          <p:cNvPicPr>
+            <a:picLocks noChangeAspect="1"/>
+          </p:cNvPicPr>
+          <p:nvPr/>
+        </p:nvPicPr>
+        <p:blipFill>
+          <a:blip r:embed="rId2"/>
+          <a:stretch>
+            <a:fillRect/>
+          </a:stretch>
+        </p:blipFill>
+        <p:spPr>
+          <a:xfrm>
+            <a:off x="548640" y="1965960"/>
+            <a:ext cx="7071358" cy="3977639"/>
+          </a:xfrm>
+          <a:prstGeom prst="rect">
+            <a:avLst/>
+          </a:prstGeom>
+        </p:spPr>
+      </p:pic>
+      <p:sp>
+        <p:nvSpPr>
+          <p:cNvPr id="5" name="TextBox 4"/>
           <p:cNvSpPr txBox="1"/>
           <p:nvPr/>
         </p:nvSpPr>
@@ -30875,7 +34354,7 @@
               </a:defRPr>
             </a:pPr>
             <a:r>
-              <a:t>Summary &amp; next steps</a:t>
+              <a:t>Example 3: Recorders</a:t>
             </a:r>
           </a:p>
         </p:txBody>
@@ -30917,64 +34396,102 @@
               </a:defRPr>
             </a:pPr>
             <a:r>
-              <a:t>• Master UVM utility classes</a:t>
-            </a:r>
-          </a:p>
-          <a:p>
-            <a:pPr>
-              <a:lnSpc>
-                <a:spcPts val="2200"/>
-              </a:lnSpc>
-              <a:spcAft>
-                <a:spcPts val="1000"/>
-              </a:spcAft>
-              <a:defRPr sz="2000" b="0">
-                <a:solidFill>
-                  <a:srgbClr val="333333"/>
-                </a:solidFill>
-                <a:latin typeface="Calibri"/>
-              </a:defRPr>
-            </a:pPr>
-            <a:r>
-              <a:t>• Complete module8/CHECKLIST.md</a:t>
-            </a:r>
-          </a:p>
-          <a:p>
-            <a:pPr>
-              <a:lnSpc>
-                <a:spcPts val="2200"/>
-              </a:lnSpc>
-              <a:spcAft>
-                <a:spcPts val="1000"/>
-              </a:spcAft>
-              <a:defRPr sz="2000" b="0">
-                <a:solidFill>
-                  <a:srgbClr val="333333"/>
-                </a:solidFill>
-                <a:latin typeface="Calibri"/>
-              </a:defRPr>
-            </a:pPr>
-            <a:r>
-              <a:t>• Run ./scripts/module8.sh --check</a:t>
-            </a:r>
-          </a:p>
-          <a:p>
-            <a:pPr>
-              <a:lnSpc>
-                <a:spcPts val="2200"/>
-              </a:lnSpc>
-              <a:spcAft>
-                <a:spcPts val="1000"/>
-              </a:spcAft>
-              <a:defRPr sz="2000" b="0">
-                <a:solidFill>
-                  <a:srgbClr val="333333"/>
-                </a:solidFill>
-                <a:latin typeface="Calibri"/>
-              </a:defRPr>
-            </a:pPr>
-            <a:r>
-              <a:t>• Next: Next module in course</a:t>
+              <a:t>• RecorderTransaction: Transaction with recording</a:t>
+            </a:r>
+          </a:p>
+          <a:p>
+            <a:pPr>
+              <a:lnSpc>
+                <a:spcPts val="2200"/>
+              </a:lnSpc>
+              <a:spcAft>
+                <a:spcPts val="1000"/>
+              </a:spcAft>
+              <a:defRPr sz="2000" b="0">
+                <a:solidFill>
+                  <a:srgbClr val="333333"/>
+                </a:solidFill>
+                <a:latin typeface="Calibri"/>
+              </a:defRPr>
+            </a:pPr>
+            <a:r>
+              <a:t>      capabilities</a:t>
+            </a:r>
+          </a:p>
+          <a:p>
+            <a:pPr>
+              <a:lnSpc>
+                <a:spcPts val="2200"/>
+              </a:lnSpc>
+              <a:spcAft>
+                <a:spcPts val="1000"/>
+              </a:spcAft>
+              <a:defRPr sz="2000" b="0">
+                <a:solidFill>
+                  <a:srgbClr val="333333"/>
+                </a:solidFill>
+                <a:latin typeface="Calibri"/>
+              </a:defRPr>
+            </a:pPr>
+            <a:r>
+              <a:t>• TransactionRecorder: Recorder that stores</a:t>
+            </a:r>
+          </a:p>
+          <a:p>
+            <a:pPr>
+              <a:lnSpc>
+                <a:spcPts val="2200"/>
+              </a:lnSpc>
+              <a:spcAft>
+                <a:spcPts val="1000"/>
+              </a:spcAft>
+              <a:defRPr sz="2000" b="0">
+                <a:solidFill>
+                  <a:srgbClr val="333333"/>
+                </a:solidFill>
+                <a:latin typeface="Calibri"/>
+              </a:defRPr>
+            </a:pPr>
+            <a:r>
+              <a:t>      transactions</a:t>
+            </a:r>
+          </a:p>
+          <a:p>
+            <a:pPr>
+              <a:lnSpc>
+                <a:spcPts val="2200"/>
+              </a:lnSpc>
+              <a:spcAft>
+                <a:spcPts val="1000"/>
+              </a:spcAft>
+              <a:defRPr sz="2000" b="0">
+                <a:solidFill>
+                  <a:srgbClr val="333333"/>
+                </a:solidFill>
+                <a:latin typeface="Calibri"/>
+              </a:defRPr>
+            </a:pPr>
+            <a:r>
+              <a:t>• RecorderTest: Test demonstrating transaction</a:t>
+            </a:r>
+          </a:p>
+          <a:p>
+            <a:pPr>
+              <a:lnSpc>
+                <a:spcPts val="2200"/>
+              </a:lnSpc>
+              <a:spcAft>
+                <a:spcPts val="1000"/>
+              </a:spcAft>
+              <a:defRPr sz="2000" b="0">
+                <a:solidFill>
+                  <a:srgbClr val="333333"/>
+                </a:solidFill>
+                <a:latin typeface="Calibri"/>
+              </a:defRPr>
+            </a:pPr>
+            <a:r>
+              <a:t>      recording</a:t>
             </a:r>
           </a:p>
         </p:txBody>
@@ -30982,6 +34499,1530 @@
       <p:sp>
         <p:nvSpPr>
           <p:cNvPr id="4" name="TextBox 3"/>
+          <p:cNvSpPr txBox="1"/>
+          <p:nvPr/>
+        </p:nvSpPr>
+        <p:spPr>
+          <a:xfrm>
+            <a:off x="548640" y="6355080"/>
+            <a:ext cx="11064240" cy="320040"/>
+          </a:xfrm>
+          <a:prstGeom prst="rect">
+            <a:avLst/>
+          </a:prstGeom>
+          <a:noFill/>
+        </p:spPr>
+        <p:txBody>
+          <a:bodyPr wrap="square">
+            <a:noAutofit/>
+          </a:bodyPr>
+          <a:lstStyle/>
+          <a:p>
+            <a:pPr algn="r">
+              <a:lnSpc>
+                <a:spcPts val="2200"/>
+              </a:lnSpc>
+              <a:defRPr sz="1000" b="0">
+                <a:solidFill>
+                  <a:srgbClr val="666666"/>
+                </a:solidFill>
+                <a:latin typeface="Calibri"/>
+              </a:defRPr>
+            </a:pPr>
+            <a:r>
+              <a:t>learn_uvm2017_sv_verilator / Module 8</a:t>
+            </a:r>
+          </a:p>
+        </p:txBody>
+      </p:sp>
+    </p:spTree>
+  </p:cSld>
+  <p:clrMapOvr>
+    <a:masterClrMapping/>
+  </p:clrMapOvr>
+</p:sld>
+</file>
+
+<file path=ppt/slides/slide91.xml><?xml version="1.0" encoding="utf-8"?>
+<p:sld xmlns:a="http://schemas.openxmlformats.org/drawingml/2006/main" xmlns:p="http://schemas.openxmlformats.org/presentationml/2006/main" xmlns:r="http://schemas.openxmlformats.org/officeDocument/2006/relationships">
+  <p:cSld>
+    <p:spTree>
+      <p:nvGrpSpPr>
+        <p:cNvPr id="1" name=""/>
+        <p:cNvGrpSpPr/>
+        <p:nvPr/>
+      </p:nvGrpSpPr>
+      <p:grpSpPr/>
+      <p:sp>
+        <p:nvSpPr>
+          <p:cNvPr id="2" name="TextBox 1"/>
+          <p:cNvSpPr txBox="1"/>
+          <p:nvPr/>
+        </p:nvSpPr>
+        <p:spPr>
+          <a:xfrm>
+            <a:off x="548640" y="411480"/>
+            <a:ext cx="11064240" cy="777240"/>
+          </a:xfrm>
+          <a:prstGeom prst="rect">
+            <a:avLst/>
+          </a:prstGeom>
+          <a:noFill/>
+        </p:spPr>
+        <p:txBody>
+          <a:bodyPr wrap="square">
+            <a:noAutofit/>
+          </a:bodyPr>
+          <a:lstStyle/>
+          <a:p>
+            <a:pPr>
+              <a:lnSpc>
+                <a:spcPts val="2200"/>
+              </a:lnSpc>
+              <a:defRPr sz="2800" b="1">
+                <a:solidFill>
+                  <a:srgbClr val="1A1A2E"/>
+                </a:solidFill>
+                <a:latin typeface="Calibri"/>
+              </a:defRPr>
+            </a:pPr>
+            <a:r>
+              <a:t>Demo: Recorders</a:t>
+            </a:r>
+          </a:p>
+        </p:txBody>
+      </p:sp>
+      <p:sp>
+        <p:nvSpPr>
+          <p:cNvPr id="3" name="TextBox 2"/>
+          <p:cNvSpPr txBox="1"/>
+          <p:nvPr/>
+        </p:nvSpPr>
+        <p:spPr>
+          <a:xfrm>
+            <a:off x="548640" y="1051560"/>
+            <a:ext cx="11064240" cy="914400"/>
+          </a:xfrm>
+          <a:prstGeom prst="rect">
+            <a:avLst/>
+          </a:prstGeom>
+          <a:solidFill>
+            <a:srgbClr val="F4F4F4"/>
+          </a:solidFill>
+        </p:spPr>
+        <p:txBody>
+          <a:bodyPr wrap="square">
+            <a:noAutofit/>
+          </a:bodyPr>
+          <a:lstStyle/>
+          <a:p>
+            <a:pPr>
+              <a:lnSpc>
+                <a:spcPts val="2200"/>
+              </a:lnSpc>
+              <a:spcAft>
+                <a:spcPts val="200"/>
+              </a:spcAft>
+              <a:defRPr sz="2000" b="0">
+                <a:solidFill>
+                  <a:srgbClr val="333333"/>
+                </a:solidFill>
+                <a:latin typeface="Consolas"/>
+              </a:defRPr>
+            </a:pPr>
+            <a:r>
+              <a:t>$ ./scripts/module8.sh --recorders</a:t>
+            </a:r>
+          </a:p>
+        </p:txBody>
+      </p:sp>
+      <p:pic>
+        <p:nvPicPr>
+          <p:cNvPr id="4" name="Picture 3" descr="ex03_recorders.png"/>
+          <p:cNvPicPr>
+            <a:picLocks noChangeAspect="1"/>
+          </p:cNvPicPr>
+          <p:nvPr/>
+        </p:nvPicPr>
+        <p:blipFill>
+          <a:blip r:embed="rId2"/>
+          <a:stretch>
+            <a:fillRect/>
+          </a:stretch>
+        </p:blipFill>
+        <p:spPr>
+          <a:xfrm>
+            <a:off x="548640" y="1965960"/>
+            <a:ext cx="7071358" cy="3977639"/>
+          </a:xfrm>
+          <a:prstGeom prst="rect">
+            <a:avLst/>
+          </a:prstGeom>
+        </p:spPr>
+      </p:pic>
+      <p:sp>
+        <p:nvSpPr>
+          <p:cNvPr id="5" name="TextBox 4"/>
+          <p:cNvSpPr txBox="1"/>
+          <p:nvPr/>
+        </p:nvSpPr>
+        <p:spPr>
+          <a:xfrm>
+            <a:off x="548640" y="6355080"/>
+            <a:ext cx="11064240" cy="320040"/>
+          </a:xfrm>
+          <a:prstGeom prst="rect">
+            <a:avLst/>
+          </a:prstGeom>
+          <a:noFill/>
+        </p:spPr>
+        <p:txBody>
+          <a:bodyPr wrap="square">
+            <a:noAutofit/>
+          </a:bodyPr>
+          <a:lstStyle/>
+          <a:p>
+            <a:pPr algn="r">
+              <a:lnSpc>
+                <a:spcPts val="2200"/>
+              </a:lnSpc>
+              <a:defRPr sz="1000" b="0">
+                <a:solidFill>
+                  <a:srgbClr val="666666"/>
+                </a:solidFill>
+                <a:latin typeface="Calibri"/>
+              </a:defRPr>
+            </a:pPr>
+            <a:r>
+              <a:t>learn_uvm2017_sv_verilator / Module 8</a:t>
+            </a:r>
+          </a:p>
+        </p:txBody>
+      </p:sp>
+    </p:spTree>
+  </p:cSld>
+  <p:clrMapOvr>
+    <a:masterClrMapping/>
+  </p:clrMapOvr>
+</p:sld>
+</file>
+
+<file path=ppt/slides/slide92.xml><?xml version="1.0" encoding="utf-8"?>
+<p:sld xmlns:a="http://schemas.openxmlformats.org/drawingml/2006/main" xmlns:p="http://schemas.openxmlformats.org/presentationml/2006/main" xmlns:r="http://schemas.openxmlformats.org/officeDocument/2006/relationships">
+  <p:cSld>
+    <p:spTree>
+      <p:nvGrpSpPr>
+        <p:cNvPr id="1" name=""/>
+        <p:cNvGrpSpPr/>
+        <p:nvPr/>
+      </p:nvGrpSpPr>
+      <p:grpSpPr/>
+      <p:sp>
+        <p:nvSpPr>
+          <p:cNvPr id="2" name="TextBox 1"/>
+          <p:cNvSpPr txBox="1"/>
+          <p:nvPr/>
+        </p:nvSpPr>
+        <p:spPr>
+          <a:xfrm>
+            <a:off x="548640" y="411480"/>
+            <a:ext cx="11064240" cy="777240"/>
+          </a:xfrm>
+          <a:prstGeom prst="rect">
+            <a:avLst/>
+          </a:prstGeom>
+          <a:noFill/>
+        </p:spPr>
+        <p:txBody>
+          <a:bodyPr wrap="square">
+            <a:noAutofit/>
+          </a:bodyPr>
+          <a:lstStyle/>
+          <a:p>
+            <a:pPr>
+              <a:lnSpc>
+                <a:spcPts val="2200"/>
+              </a:lnSpc>
+              <a:defRPr sz="2800" b="1">
+                <a:solidFill>
+                  <a:srgbClr val="1A1A2E"/>
+                </a:solidFill>
+                <a:latin typeface="Calibri"/>
+              </a:defRPr>
+            </a:pPr>
+            <a:r>
+              <a:t>Example 4: Pools</a:t>
+            </a:r>
+          </a:p>
+        </p:txBody>
+      </p:sp>
+      <p:sp>
+        <p:nvSpPr>
+          <p:cNvPr id="3" name="TextBox 2"/>
+          <p:cNvSpPr txBox="1"/>
+          <p:nvPr/>
+        </p:nvSpPr>
+        <p:spPr>
+          <a:xfrm>
+            <a:off x="548640" y="1234440"/>
+            <a:ext cx="11064240" cy="4937760"/>
+          </a:xfrm>
+          <a:prstGeom prst="rect">
+            <a:avLst/>
+          </a:prstGeom>
+          <a:noFill/>
+        </p:spPr>
+        <p:txBody>
+          <a:bodyPr wrap="square">
+            <a:noAutofit/>
+          </a:bodyPr>
+          <a:lstStyle/>
+          <a:p>
+            <a:pPr>
+              <a:lnSpc>
+                <a:spcPts val="2200"/>
+              </a:lnSpc>
+              <a:spcAft>
+                <a:spcPts val="1000"/>
+              </a:spcAft>
+              <a:defRPr sz="2000" b="0">
+                <a:solidFill>
+                  <a:srgbClr val="333333"/>
+                </a:solidFill>
+                <a:latin typeface="Calibri"/>
+              </a:defRPr>
+            </a:pPr>
+            <a:r>
+              <a:t>• PoolTransaction: Transaction for pool example</a:t>
+            </a:r>
+          </a:p>
+          <a:p>
+            <a:pPr>
+              <a:lnSpc>
+                <a:spcPts val="2200"/>
+              </a:lnSpc>
+              <a:spcAft>
+                <a:spcPts val="1000"/>
+              </a:spcAft>
+              <a:defRPr sz="2000" b="0">
+                <a:solidFill>
+                  <a:srgbClr val="333333"/>
+                </a:solidFill>
+                <a:latin typeface="Calibri"/>
+              </a:defRPr>
+            </a:pPr>
+            <a:r>
+              <a:t>• TransactionPool: Pool implementation with</a:t>
+            </a:r>
+          </a:p>
+          <a:p>
+            <a:pPr>
+              <a:lnSpc>
+                <a:spcPts val="2200"/>
+              </a:lnSpc>
+              <a:spcAft>
+                <a:spcPts val="1000"/>
+              </a:spcAft>
+              <a:defRPr sz="2000" b="0">
+                <a:solidFill>
+                  <a:srgbClr val="333333"/>
+                </a:solidFill>
+                <a:latin typeface="Calibri"/>
+              </a:defRPr>
+            </a:pPr>
+            <a:r>
+              <a:t>      allocate/free</a:t>
+            </a:r>
+          </a:p>
+          <a:p>
+            <a:pPr>
+              <a:lnSpc>
+                <a:spcPts val="2200"/>
+              </a:lnSpc>
+              <a:spcAft>
+                <a:spcPts val="1000"/>
+              </a:spcAft>
+              <a:defRPr sz="2000" b="0">
+                <a:solidFill>
+                  <a:srgbClr val="333333"/>
+                </a:solidFill>
+                <a:latin typeface="Calibri"/>
+              </a:defRPr>
+            </a:pPr>
+            <a:r>
+              <a:t>• PoolTest: Test demonstrating object pooling</a:t>
+            </a:r>
+          </a:p>
+        </p:txBody>
+      </p:sp>
+      <p:sp>
+        <p:nvSpPr>
+          <p:cNvPr id="4" name="TextBox 3"/>
+          <p:cNvSpPr txBox="1"/>
+          <p:nvPr/>
+        </p:nvSpPr>
+        <p:spPr>
+          <a:xfrm>
+            <a:off x="548640" y="6355080"/>
+            <a:ext cx="11064240" cy="320040"/>
+          </a:xfrm>
+          <a:prstGeom prst="rect">
+            <a:avLst/>
+          </a:prstGeom>
+          <a:noFill/>
+        </p:spPr>
+        <p:txBody>
+          <a:bodyPr wrap="square">
+            <a:noAutofit/>
+          </a:bodyPr>
+          <a:lstStyle/>
+          <a:p>
+            <a:pPr algn="r">
+              <a:lnSpc>
+                <a:spcPts val="2200"/>
+              </a:lnSpc>
+              <a:defRPr sz="1000" b="0">
+                <a:solidFill>
+                  <a:srgbClr val="666666"/>
+                </a:solidFill>
+                <a:latin typeface="Calibri"/>
+              </a:defRPr>
+            </a:pPr>
+            <a:r>
+              <a:t>learn_uvm2017_sv_verilator / Module 8</a:t>
+            </a:r>
+          </a:p>
+        </p:txBody>
+      </p:sp>
+    </p:spTree>
+  </p:cSld>
+  <p:clrMapOvr>
+    <a:masterClrMapping/>
+  </p:clrMapOvr>
+</p:sld>
+</file>
+
+<file path=ppt/slides/slide93.xml><?xml version="1.0" encoding="utf-8"?>
+<p:sld xmlns:a="http://schemas.openxmlformats.org/drawingml/2006/main" xmlns:p="http://schemas.openxmlformats.org/presentationml/2006/main" xmlns:r="http://schemas.openxmlformats.org/officeDocument/2006/relationships">
+  <p:cSld>
+    <p:spTree>
+      <p:nvGrpSpPr>
+        <p:cNvPr id="1" name=""/>
+        <p:cNvGrpSpPr/>
+        <p:nvPr/>
+      </p:nvGrpSpPr>
+      <p:grpSpPr/>
+      <p:sp>
+        <p:nvSpPr>
+          <p:cNvPr id="2" name="TextBox 1"/>
+          <p:cNvSpPr txBox="1"/>
+          <p:nvPr/>
+        </p:nvSpPr>
+        <p:spPr>
+          <a:xfrm>
+            <a:off x="548640" y="411480"/>
+            <a:ext cx="11064240" cy="777240"/>
+          </a:xfrm>
+          <a:prstGeom prst="rect">
+            <a:avLst/>
+          </a:prstGeom>
+          <a:noFill/>
+        </p:spPr>
+        <p:txBody>
+          <a:bodyPr wrap="square">
+            <a:noAutofit/>
+          </a:bodyPr>
+          <a:lstStyle/>
+          <a:p>
+            <a:pPr>
+              <a:lnSpc>
+                <a:spcPts val="2200"/>
+              </a:lnSpc>
+              <a:defRPr sz="2800" b="1">
+                <a:solidFill>
+                  <a:srgbClr val="1A1A2E"/>
+                </a:solidFill>
+                <a:latin typeface="Calibri"/>
+              </a:defRPr>
+            </a:pPr>
+            <a:r>
+              <a:t>Demo: Pools</a:t>
+            </a:r>
+          </a:p>
+        </p:txBody>
+      </p:sp>
+      <p:sp>
+        <p:nvSpPr>
+          <p:cNvPr id="3" name="TextBox 2"/>
+          <p:cNvSpPr txBox="1"/>
+          <p:nvPr/>
+        </p:nvSpPr>
+        <p:spPr>
+          <a:xfrm>
+            <a:off x="548640" y="1051560"/>
+            <a:ext cx="11064240" cy="914400"/>
+          </a:xfrm>
+          <a:prstGeom prst="rect">
+            <a:avLst/>
+          </a:prstGeom>
+          <a:solidFill>
+            <a:srgbClr val="F4F4F4"/>
+          </a:solidFill>
+        </p:spPr>
+        <p:txBody>
+          <a:bodyPr wrap="square">
+            <a:noAutofit/>
+          </a:bodyPr>
+          <a:lstStyle/>
+          <a:p>
+            <a:pPr>
+              <a:lnSpc>
+                <a:spcPts val="2200"/>
+              </a:lnSpc>
+              <a:spcAft>
+                <a:spcPts val="200"/>
+              </a:spcAft>
+              <a:defRPr sz="2000" b="0">
+                <a:solidFill>
+                  <a:srgbClr val="333333"/>
+                </a:solidFill>
+                <a:latin typeface="Consolas"/>
+              </a:defRPr>
+            </a:pPr>
+            <a:r>
+              <a:t>$ ./scripts/module8.sh --pools</a:t>
+            </a:r>
+          </a:p>
+        </p:txBody>
+      </p:sp>
+      <p:pic>
+        <p:nvPicPr>
+          <p:cNvPr id="4" name="Picture 3" descr="ex04_pools.png"/>
+          <p:cNvPicPr>
+            <a:picLocks noChangeAspect="1"/>
+          </p:cNvPicPr>
+          <p:nvPr/>
+        </p:nvPicPr>
+        <p:blipFill>
+          <a:blip r:embed="rId2"/>
+          <a:stretch>
+            <a:fillRect/>
+          </a:stretch>
+        </p:blipFill>
+        <p:spPr>
+          <a:xfrm>
+            <a:off x="548640" y="1965960"/>
+            <a:ext cx="7071358" cy="3977639"/>
+          </a:xfrm>
+          <a:prstGeom prst="rect">
+            <a:avLst/>
+          </a:prstGeom>
+        </p:spPr>
+      </p:pic>
+      <p:sp>
+        <p:nvSpPr>
+          <p:cNvPr id="5" name="TextBox 4"/>
+          <p:cNvSpPr txBox="1"/>
+          <p:nvPr/>
+        </p:nvSpPr>
+        <p:spPr>
+          <a:xfrm>
+            <a:off x="548640" y="6355080"/>
+            <a:ext cx="11064240" cy="320040"/>
+          </a:xfrm>
+          <a:prstGeom prst="rect">
+            <a:avLst/>
+          </a:prstGeom>
+          <a:noFill/>
+        </p:spPr>
+        <p:txBody>
+          <a:bodyPr wrap="square">
+            <a:noAutofit/>
+          </a:bodyPr>
+          <a:lstStyle/>
+          <a:p>
+            <a:pPr algn="r">
+              <a:lnSpc>
+                <a:spcPts val="2200"/>
+              </a:lnSpc>
+              <a:defRPr sz="1000" b="0">
+                <a:solidFill>
+                  <a:srgbClr val="666666"/>
+                </a:solidFill>
+                <a:latin typeface="Calibri"/>
+              </a:defRPr>
+            </a:pPr>
+            <a:r>
+              <a:t>learn_uvm2017_sv_verilator / Module 8</a:t>
+            </a:r>
+          </a:p>
+        </p:txBody>
+      </p:sp>
+    </p:spTree>
+  </p:cSld>
+  <p:clrMapOvr>
+    <a:masterClrMapping/>
+  </p:clrMapOvr>
+</p:sld>
+</file>
+
+<file path=ppt/slides/slide94.xml><?xml version="1.0" encoding="utf-8"?>
+<p:sld xmlns:a="http://schemas.openxmlformats.org/drawingml/2006/main" xmlns:p="http://schemas.openxmlformats.org/presentationml/2006/main" xmlns:r="http://schemas.openxmlformats.org/officeDocument/2006/relationships">
+  <p:cSld>
+    <p:spTree>
+      <p:nvGrpSpPr>
+        <p:cNvPr id="1" name=""/>
+        <p:cNvGrpSpPr/>
+        <p:nvPr/>
+      </p:nvGrpSpPr>
+      <p:grpSpPr/>
+      <p:sp>
+        <p:nvSpPr>
+          <p:cNvPr id="2" name="TextBox 1"/>
+          <p:cNvSpPr txBox="1"/>
+          <p:nvPr/>
+        </p:nvSpPr>
+        <p:spPr>
+          <a:xfrm>
+            <a:off x="548640" y="411480"/>
+            <a:ext cx="11064240" cy="777240"/>
+          </a:xfrm>
+          <a:prstGeom prst="rect">
+            <a:avLst/>
+          </a:prstGeom>
+          <a:noFill/>
+        </p:spPr>
+        <p:txBody>
+          <a:bodyPr wrap="square">
+            <a:noAutofit/>
+          </a:bodyPr>
+          <a:lstStyle/>
+          <a:p>
+            <a:pPr>
+              <a:lnSpc>
+                <a:spcPts val="2200"/>
+              </a:lnSpc>
+              <a:defRPr sz="2800" b="1">
+                <a:solidFill>
+                  <a:srgbClr val="1A1A2E"/>
+                </a:solidFill>
+                <a:latin typeface="Calibri"/>
+              </a:defRPr>
+            </a:pPr>
+            <a:r>
+              <a:t>Example 5: Queues</a:t>
+            </a:r>
+          </a:p>
+        </p:txBody>
+      </p:sp>
+      <p:sp>
+        <p:nvSpPr>
+          <p:cNvPr id="3" name="TextBox 2"/>
+          <p:cNvSpPr txBox="1"/>
+          <p:nvPr/>
+        </p:nvSpPr>
+        <p:spPr>
+          <a:xfrm>
+            <a:off x="548640" y="1234440"/>
+            <a:ext cx="11064240" cy="4937760"/>
+          </a:xfrm>
+          <a:prstGeom prst="rect">
+            <a:avLst/>
+          </a:prstGeom>
+          <a:noFill/>
+        </p:spPr>
+        <p:txBody>
+          <a:bodyPr wrap="square">
+            <a:noAutofit/>
+          </a:bodyPr>
+          <a:lstStyle/>
+          <a:p>
+            <a:pPr>
+              <a:lnSpc>
+                <a:spcPts val="2200"/>
+              </a:lnSpc>
+              <a:spcAft>
+                <a:spcPts val="1000"/>
+              </a:spcAft>
+              <a:defRPr sz="2000" b="0">
+                <a:solidFill>
+                  <a:srgbClr val="333333"/>
+                </a:solidFill>
+                <a:latin typeface="Calibri"/>
+              </a:defRPr>
+            </a:pPr>
+            <a:r>
+              <a:t>• QueueTransaction: Transaction for queue example</a:t>
+            </a:r>
+          </a:p>
+          <a:p>
+            <a:pPr>
+              <a:lnSpc>
+                <a:spcPts val="2200"/>
+              </a:lnSpc>
+              <a:spcAft>
+                <a:spcPts val="1000"/>
+              </a:spcAft>
+              <a:defRPr sz="2000" b="0">
+                <a:solidFill>
+                  <a:srgbClr val="333333"/>
+                </a:solidFill>
+                <a:latin typeface="Calibri"/>
+              </a:defRPr>
+            </a:pPr>
+            <a:r>
+              <a:t>• QueueManager: Queue manager with FIFO and priority</a:t>
+            </a:r>
+          </a:p>
+          <a:p>
+            <a:pPr>
+              <a:lnSpc>
+                <a:spcPts val="2200"/>
+              </a:lnSpc>
+              <a:spcAft>
+                <a:spcPts val="1000"/>
+              </a:spcAft>
+              <a:defRPr sz="2000" b="0">
+                <a:solidFill>
+                  <a:srgbClr val="333333"/>
+                </a:solidFill>
+                <a:latin typeface="Calibri"/>
+              </a:defRPr>
+            </a:pPr>
+            <a:r>
+              <a:t>      queues</a:t>
+            </a:r>
+          </a:p>
+          <a:p>
+            <a:pPr>
+              <a:lnSpc>
+                <a:spcPts val="2200"/>
+              </a:lnSpc>
+              <a:spcAft>
+                <a:spcPts val="1000"/>
+              </a:spcAft>
+              <a:defRPr sz="2000" b="0">
+                <a:solidFill>
+                  <a:srgbClr val="333333"/>
+                </a:solidFill>
+                <a:latin typeface="Calibri"/>
+              </a:defRPr>
+            </a:pPr>
+            <a:r>
+              <a:t>• QueueTest: Test demonstrating queue operations</a:t>
+            </a:r>
+          </a:p>
+        </p:txBody>
+      </p:sp>
+      <p:sp>
+        <p:nvSpPr>
+          <p:cNvPr id="4" name="TextBox 3"/>
+          <p:cNvSpPr txBox="1"/>
+          <p:nvPr/>
+        </p:nvSpPr>
+        <p:spPr>
+          <a:xfrm>
+            <a:off x="548640" y="6355080"/>
+            <a:ext cx="11064240" cy="320040"/>
+          </a:xfrm>
+          <a:prstGeom prst="rect">
+            <a:avLst/>
+          </a:prstGeom>
+          <a:noFill/>
+        </p:spPr>
+        <p:txBody>
+          <a:bodyPr wrap="square">
+            <a:noAutofit/>
+          </a:bodyPr>
+          <a:lstStyle/>
+          <a:p>
+            <a:pPr algn="r">
+              <a:lnSpc>
+                <a:spcPts val="2200"/>
+              </a:lnSpc>
+              <a:defRPr sz="1000" b="0">
+                <a:solidFill>
+                  <a:srgbClr val="666666"/>
+                </a:solidFill>
+                <a:latin typeface="Calibri"/>
+              </a:defRPr>
+            </a:pPr>
+            <a:r>
+              <a:t>learn_uvm2017_sv_verilator / Module 8</a:t>
+            </a:r>
+          </a:p>
+        </p:txBody>
+      </p:sp>
+    </p:spTree>
+  </p:cSld>
+  <p:clrMapOvr>
+    <a:masterClrMapping/>
+  </p:clrMapOvr>
+</p:sld>
+</file>
+
+<file path=ppt/slides/slide95.xml><?xml version="1.0" encoding="utf-8"?>
+<p:sld xmlns:a="http://schemas.openxmlformats.org/drawingml/2006/main" xmlns:p="http://schemas.openxmlformats.org/presentationml/2006/main" xmlns:r="http://schemas.openxmlformats.org/officeDocument/2006/relationships">
+  <p:cSld>
+    <p:spTree>
+      <p:nvGrpSpPr>
+        <p:cNvPr id="1" name=""/>
+        <p:cNvGrpSpPr/>
+        <p:nvPr/>
+      </p:nvGrpSpPr>
+      <p:grpSpPr/>
+      <p:sp>
+        <p:nvSpPr>
+          <p:cNvPr id="2" name="TextBox 1"/>
+          <p:cNvSpPr txBox="1"/>
+          <p:nvPr/>
+        </p:nvSpPr>
+        <p:spPr>
+          <a:xfrm>
+            <a:off x="548640" y="411480"/>
+            <a:ext cx="11064240" cy="777240"/>
+          </a:xfrm>
+          <a:prstGeom prst="rect">
+            <a:avLst/>
+          </a:prstGeom>
+          <a:noFill/>
+        </p:spPr>
+        <p:txBody>
+          <a:bodyPr wrap="square">
+            <a:noAutofit/>
+          </a:bodyPr>
+          <a:lstStyle/>
+          <a:p>
+            <a:pPr>
+              <a:lnSpc>
+                <a:spcPts val="2200"/>
+              </a:lnSpc>
+              <a:defRPr sz="2800" b="1">
+                <a:solidFill>
+                  <a:srgbClr val="1A1A2E"/>
+                </a:solidFill>
+                <a:latin typeface="Calibri"/>
+              </a:defRPr>
+            </a:pPr>
+            <a:r>
+              <a:t>Demo: Queues</a:t>
+            </a:r>
+          </a:p>
+        </p:txBody>
+      </p:sp>
+      <p:sp>
+        <p:nvSpPr>
+          <p:cNvPr id="3" name="TextBox 2"/>
+          <p:cNvSpPr txBox="1"/>
+          <p:nvPr/>
+        </p:nvSpPr>
+        <p:spPr>
+          <a:xfrm>
+            <a:off x="548640" y="1051560"/>
+            <a:ext cx="11064240" cy="914400"/>
+          </a:xfrm>
+          <a:prstGeom prst="rect">
+            <a:avLst/>
+          </a:prstGeom>
+          <a:solidFill>
+            <a:srgbClr val="F4F4F4"/>
+          </a:solidFill>
+        </p:spPr>
+        <p:txBody>
+          <a:bodyPr wrap="square">
+            <a:noAutofit/>
+          </a:bodyPr>
+          <a:lstStyle/>
+          <a:p>
+            <a:pPr>
+              <a:lnSpc>
+                <a:spcPts val="2200"/>
+              </a:lnSpc>
+              <a:spcAft>
+                <a:spcPts val="200"/>
+              </a:spcAft>
+              <a:defRPr sz="2000" b="0">
+                <a:solidFill>
+                  <a:srgbClr val="333333"/>
+                </a:solidFill>
+                <a:latin typeface="Consolas"/>
+              </a:defRPr>
+            </a:pPr>
+            <a:r>
+              <a:t>$ ./scripts/module8.sh --queues</a:t>
+            </a:r>
+          </a:p>
+        </p:txBody>
+      </p:sp>
+      <p:pic>
+        <p:nvPicPr>
+          <p:cNvPr id="4" name="Picture 3" descr="ex05_queues.png"/>
+          <p:cNvPicPr>
+            <a:picLocks noChangeAspect="1"/>
+          </p:cNvPicPr>
+          <p:nvPr/>
+        </p:nvPicPr>
+        <p:blipFill>
+          <a:blip r:embed="rId2"/>
+          <a:stretch>
+            <a:fillRect/>
+          </a:stretch>
+        </p:blipFill>
+        <p:spPr>
+          <a:xfrm>
+            <a:off x="548640" y="1965960"/>
+            <a:ext cx="7071358" cy="3977639"/>
+          </a:xfrm>
+          <a:prstGeom prst="rect">
+            <a:avLst/>
+          </a:prstGeom>
+        </p:spPr>
+      </p:pic>
+      <p:sp>
+        <p:nvSpPr>
+          <p:cNvPr id="5" name="TextBox 4"/>
+          <p:cNvSpPr txBox="1"/>
+          <p:nvPr/>
+        </p:nvSpPr>
+        <p:spPr>
+          <a:xfrm>
+            <a:off x="548640" y="6355080"/>
+            <a:ext cx="11064240" cy="320040"/>
+          </a:xfrm>
+          <a:prstGeom prst="rect">
+            <a:avLst/>
+          </a:prstGeom>
+          <a:noFill/>
+        </p:spPr>
+        <p:txBody>
+          <a:bodyPr wrap="square">
+            <a:noAutofit/>
+          </a:bodyPr>
+          <a:lstStyle/>
+          <a:p>
+            <a:pPr algn="r">
+              <a:lnSpc>
+                <a:spcPts val="2200"/>
+              </a:lnSpc>
+              <a:defRPr sz="1000" b="0">
+                <a:solidFill>
+                  <a:srgbClr val="666666"/>
+                </a:solidFill>
+                <a:latin typeface="Calibri"/>
+              </a:defRPr>
+            </a:pPr>
+            <a:r>
+              <a:t>learn_uvm2017_sv_verilator / Module 8</a:t>
+            </a:r>
+          </a:p>
+        </p:txBody>
+      </p:sp>
+    </p:spTree>
+  </p:cSld>
+  <p:clrMapOvr>
+    <a:masterClrMapping/>
+  </p:clrMapOvr>
+</p:sld>
+</file>
+
+<file path=ppt/slides/slide96.xml><?xml version="1.0" encoding="utf-8"?>
+<p:sld xmlns:a="http://schemas.openxmlformats.org/drawingml/2006/main" xmlns:p="http://schemas.openxmlformats.org/presentationml/2006/main" xmlns:r="http://schemas.openxmlformats.org/officeDocument/2006/relationships">
+  <p:cSld>
+    <p:spTree>
+      <p:nvGrpSpPr>
+        <p:cNvPr id="1" name=""/>
+        <p:cNvGrpSpPr/>
+        <p:nvPr/>
+      </p:nvGrpSpPr>
+      <p:grpSpPr/>
+      <p:sp>
+        <p:nvSpPr>
+          <p:cNvPr id="2" name="TextBox 1"/>
+          <p:cNvSpPr txBox="1"/>
+          <p:nvPr/>
+        </p:nvSpPr>
+        <p:spPr>
+          <a:xfrm>
+            <a:off x="548640" y="411480"/>
+            <a:ext cx="11064240" cy="777240"/>
+          </a:xfrm>
+          <a:prstGeom prst="rect">
+            <a:avLst/>
+          </a:prstGeom>
+          <a:noFill/>
+        </p:spPr>
+        <p:txBody>
+          <a:bodyPr wrap="square">
+            <a:noAutofit/>
+          </a:bodyPr>
+          <a:lstStyle/>
+          <a:p>
+            <a:pPr>
+              <a:lnSpc>
+                <a:spcPts val="2200"/>
+              </a:lnSpc>
+              <a:defRPr sz="2800" b="1">
+                <a:solidFill>
+                  <a:srgbClr val="1A1A2E"/>
+                </a:solidFill>
+                <a:latin typeface="Calibri"/>
+              </a:defRPr>
+            </a:pPr>
+            <a:r>
+              <a:t>Example 6: String Utilities</a:t>
+            </a:r>
+          </a:p>
+        </p:txBody>
+      </p:sp>
+      <p:sp>
+        <p:nvSpPr>
+          <p:cNvPr id="3" name="TextBox 2"/>
+          <p:cNvSpPr txBox="1"/>
+          <p:nvPr/>
+        </p:nvSpPr>
+        <p:spPr>
+          <a:xfrm>
+            <a:off x="548640" y="1234440"/>
+            <a:ext cx="11064240" cy="4937760"/>
+          </a:xfrm>
+          <a:prstGeom prst="rect">
+            <a:avLst/>
+          </a:prstGeom>
+          <a:noFill/>
+        </p:spPr>
+        <p:txBody>
+          <a:bodyPr wrap="square">
+            <a:noAutofit/>
+          </a:bodyPr>
+          <a:lstStyle/>
+          <a:p>
+            <a:pPr>
+              <a:lnSpc>
+                <a:spcPts val="2200"/>
+              </a:lnSpc>
+              <a:spcAft>
+                <a:spcPts val="1000"/>
+              </a:spcAft>
+              <a:defRPr sz="2000" b="0">
+                <a:solidFill>
+                  <a:srgbClr val="333333"/>
+                </a:solidFill>
+                <a:latin typeface="Calibri"/>
+              </a:defRPr>
+            </a:pPr>
+            <a:r>
+              <a:t>• StringUtils: Utility class for string operations</a:t>
+            </a:r>
+          </a:p>
+          <a:p>
+            <a:pPr>
+              <a:lnSpc>
+                <a:spcPts val="2200"/>
+              </a:lnSpc>
+              <a:spcAft>
+                <a:spcPts val="1000"/>
+              </a:spcAft>
+              <a:defRPr sz="2000" b="0">
+                <a:solidFill>
+                  <a:srgbClr val="333333"/>
+                </a:solidFill>
+                <a:latin typeface="Calibri"/>
+              </a:defRPr>
+            </a:pPr>
+            <a:r>
+              <a:t>• StringTest: Test demonstrating string utilities</a:t>
+            </a:r>
+          </a:p>
+        </p:txBody>
+      </p:sp>
+      <p:sp>
+        <p:nvSpPr>
+          <p:cNvPr id="4" name="TextBox 3"/>
+          <p:cNvSpPr txBox="1"/>
+          <p:nvPr/>
+        </p:nvSpPr>
+        <p:spPr>
+          <a:xfrm>
+            <a:off x="548640" y="6355080"/>
+            <a:ext cx="11064240" cy="320040"/>
+          </a:xfrm>
+          <a:prstGeom prst="rect">
+            <a:avLst/>
+          </a:prstGeom>
+          <a:noFill/>
+        </p:spPr>
+        <p:txBody>
+          <a:bodyPr wrap="square">
+            <a:noAutofit/>
+          </a:bodyPr>
+          <a:lstStyle/>
+          <a:p>
+            <a:pPr algn="r">
+              <a:lnSpc>
+                <a:spcPts val="2200"/>
+              </a:lnSpc>
+              <a:defRPr sz="1000" b="0">
+                <a:solidFill>
+                  <a:srgbClr val="666666"/>
+                </a:solidFill>
+                <a:latin typeface="Calibri"/>
+              </a:defRPr>
+            </a:pPr>
+            <a:r>
+              <a:t>learn_uvm2017_sv_verilator / Module 8</a:t>
+            </a:r>
+          </a:p>
+        </p:txBody>
+      </p:sp>
+    </p:spTree>
+  </p:cSld>
+  <p:clrMapOvr>
+    <a:masterClrMapping/>
+  </p:clrMapOvr>
+</p:sld>
+</file>
+
+<file path=ppt/slides/slide97.xml><?xml version="1.0" encoding="utf-8"?>
+<p:sld xmlns:a="http://schemas.openxmlformats.org/drawingml/2006/main" xmlns:p="http://schemas.openxmlformats.org/presentationml/2006/main" xmlns:r="http://schemas.openxmlformats.org/officeDocument/2006/relationships">
+  <p:cSld>
+    <p:spTree>
+      <p:nvGrpSpPr>
+        <p:cNvPr id="1" name=""/>
+        <p:cNvGrpSpPr/>
+        <p:nvPr/>
+      </p:nvGrpSpPr>
+      <p:grpSpPr/>
+      <p:sp>
+        <p:nvSpPr>
+          <p:cNvPr id="2" name="TextBox 1"/>
+          <p:cNvSpPr txBox="1"/>
+          <p:nvPr/>
+        </p:nvSpPr>
+        <p:spPr>
+          <a:xfrm>
+            <a:off x="548640" y="411480"/>
+            <a:ext cx="11064240" cy="777240"/>
+          </a:xfrm>
+          <a:prstGeom prst="rect">
+            <a:avLst/>
+          </a:prstGeom>
+          <a:noFill/>
+        </p:spPr>
+        <p:txBody>
+          <a:bodyPr wrap="square">
+            <a:noAutofit/>
+          </a:bodyPr>
+          <a:lstStyle/>
+          <a:p>
+            <a:pPr>
+              <a:lnSpc>
+                <a:spcPts val="2200"/>
+              </a:lnSpc>
+              <a:defRPr sz="2800" b="1">
+                <a:solidFill>
+                  <a:srgbClr val="1A1A2E"/>
+                </a:solidFill>
+                <a:latin typeface="Calibri"/>
+              </a:defRPr>
+            </a:pPr>
+            <a:r>
+              <a:t>Demo: String Utilities</a:t>
+            </a:r>
+          </a:p>
+        </p:txBody>
+      </p:sp>
+      <p:sp>
+        <p:nvSpPr>
+          <p:cNvPr id="3" name="TextBox 2"/>
+          <p:cNvSpPr txBox="1"/>
+          <p:nvPr/>
+        </p:nvSpPr>
+        <p:spPr>
+          <a:xfrm>
+            <a:off x="548640" y="1051560"/>
+            <a:ext cx="11064240" cy="914400"/>
+          </a:xfrm>
+          <a:prstGeom prst="rect">
+            <a:avLst/>
+          </a:prstGeom>
+          <a:solidFill>
+            <a:srgbClr val="F4F4F4"/>
+          </a:solidFill>
+        </p:spPr>
+        <p:txBody>
+          <a:bodyPr wrap="square">
+            <a:noAutofit/>
+          </a:bodyPr>
+          <a:lstStyle/>
+          <a:p>
+            <a:pPr>
+              <a:lnSpc>
+                <a:spcPts val="2200"/>
+              </a:lnSpc>
+              <a:spcAft>
+                <a:spcPts val="200"/>
+              </a:spcAft>
+              <a:defRPr sz="2000" b="0">
+                <a:solidFill>
+                  <a:srgbClr val="333333"/>
+                </a:solidFill>
+                <a:latin typeface="Consolas"/>
+              </a:defRPr>
+            </a:pPr>
+            <a:r>
+              <a:t>$ ./scripts/module8.sh --string-utils</a:t>
+            </a:r>
+          </a:p>
+        </p:txBody>
+      </p:sp>
+      <p:pic>
+        <p:nvPicPr>
+          <p:cNvPr id="4" name="Picture 3" descr="ex06_string_utils.png"/>
+          <p:cNvPicPr>
+            <a:picLocks noChangeAspect="1"/>
+          </p:cNvPicPr>
+          <p:nvPr/>
+        </p:nvPicPr>
+        <p:blipFill>
+          <a:blip r:embed="rId2"/>
+          <a:stretch>
+            <a:fillRect/>
+          </a:stretch>
+        </p:blipFill>
+        <p:spPr>
+          <a:xfrm>
+            <a:off x="548640" y="1965960"/>
+            <a:ext cx="7071358" cy="3977639"/>
+          </a:xfrm>
+          <a:prstGeom prst="rect">
+            <a:avLst/>
+          </a:prstGeom>
+        </p:spPr>
+      </p:pic>
+      <p:sp>
+        <p:nvSpPr>
+          <p:cNvPr id="5" name="TextBox 4"/>
+          <p:cNvSpPr txBox="1"/>
+          <p:nvPr/>
+        </p:nvSpPr>
+        <p:spPr>
+          <a:xfrm>
+            <a:off x="548640" y="6355080"/>
+            <a:ext cx="11064240" cy="320040"/>
+          </a:xfrm>
+          <a:prstGeom prst="rect">
+            <a:avLst/>
+          </a:prstGeom>
+          <a:noFill/>
+        </p:spPr>
+        <p:txBody>
+          <a:bodyPr wrap="square">
+            <a:noAutofit/>
+          </a:bodyPr>
+          <a:lstStyle/>
+          <a:p>
+            <a:pPr algn="r">
+              <a:lnSpc>
+                <a:spcPts val="2200"/>
+              </a:lnSpc>
+              <a:defRPr sz="1000" b="0">
+                <a:solidFill>
+                  <a:srgbClr val="666666"/>
+                </a:solidFill>
+                <a:latin typeface="Calibri"/>
+              </a:defRPr>
+            </a:pPr>
+            <a:r>
+              <a:t>learn_uvm2017_sv_verilator / Module 8</a:t>
+            </a:r>
+          </a:p>
+        </p:txBody>
+      </p:sp>
+    </p:spTree>
+  </p:cSld>
+  <p:clrMapOvr>
+    <a:masterClrMapping/>
+  </p:clrMapOvr>
+</p:sld>
+</file>
+
+<file path=ppt/slides/slide98.xml><?xml version="1.0" encoding="utf-8"?>
+<p:sld xmlns:a="http://schemas.openxmlformats.org/drawingml/2006/main" xmlns:p="http://schemas.openxmlformats.org/presentationml/2006/main" xmlns:r="http://schemas.openxmlformats.org/officeDocument/2006/relationships">
+  <p:cSld>
+    <p:spTree>
+      <p:nvGrpSpPr>
+        <p:cNvPr id="1" name=""/>
+        <p:cNvGrpSpPr/>
+        <p:nvPr/>
+      </p:nvGrpSpPr>
+      <p:grpSpPr/>
+      <p:sp>
+        <p:nvSpPr>
+          <p:cNvPr id="2" name="TextBox 1"/>
+          <p:cNvSpPr txBox="1"/>
+          <p:nvPr/>
+        </p:nvSpPr>
+        <p:spPr>
+          <a:xfrm>
+            <a:off x="548640" y="411480"/>
+            <a:ext cx="11064240" cy="777240"/>
+          </a:xfrm>
+          <a:prstGeom prst="rect">
+            <a:avLst/>
+          </a:prstGeom>
+          <a:noFill/>
+        </p:spPr>
+        <p:txBody>
+          <a:bodyPr wrap="square">
+            <a:noAutofit/>
+          </a:bodyPr>
+          <a:lstStyle/>
+          <a:p>
+            <a:pPr>
+              <a:lnSpc>
+                <a:spcPts val="2200"/>
+              </a:lnSpc>
+              <a:defRPr sz="2800" b="1">
+                <a:solidFill>
+                  <a:srgbClr val="1A1A2E"/>
+                </a:solidFill>
+                <a:latin typeface="Calibri"/>
+              </a:defRPr>
+            </a:pPr>
+            <a:r>
+              <a:t>Example 7: Math Utilities</a:t>
+            </a:r>
+          </a:p>
+        </p:txBody>
+      </p:sp>
+      <p:sp>
+        <p:nvSpPr>
+          <p:cNvPr id="3" name="TextBox 2"/>
+          <p:cNvSpPr txBox="1"/>
+          <p:nvPr/>
+        </p:nvSpPr>
+        <p:spPr>
+          <a:xfrm>
+            <a:off x="548640" y="1234440"/>
+            <a:ext cx="11064240" cy="4937760"/>
+          </a:xfrm>
+          <a:prstGeom prst="rect">
+            <a:avLst/>
+          </a:prstGeom>
+          <a:noFill/>
+        </p:spPr>
+        <p:txBody>
+          <a:bodyPr wrap="square">
+            <a:noAutofit/>
+          </a:bodyPr>
+          <a:lstStyle/>
+          <a:p>
+            <a:pPr>
+              <a:lnSpc>
+                <a:spcPts val="2200"/>
+              </a:lnSpc>
+              <a:spcAft>
+                <a:spcPts val="1000"/>
+              </a:spcAft>
+              <a:defRPr sz="2000" b="0">
+                <a:solidFill>
+                  <a:srgbClr val="333333"/>
+                </a:solidFill>
+                <a:latin typeface="Calibri"/>
+              </a:defRPr>
+            </a:pPr>
+            <a:r>
+              <a:t>• MathUtils: Utility class for mathematical operations</a:t>
+            </a:r>
+          </a:p>
+          <a:p>
+            <a:pPr>
+              <a:lnSpc>
+                <a:spcPts val="2200"/>
+              </a:lnSpc>
+              <a:spcAft>
+                <a:spcPts val="1000"/>
+              </a:spcAft>
+              <a:defRPr sz="2000" b="0">
+                <a:solidFill>
+                  <a:srgbClr val="333333"/>
+                </a:solidFill>
+                <a:latin typeface="Calibri"/>
+              </a:defRPr>
+            </a:pPr>
+            <a:r>
+              <a:t>• MathTest: Test demonstrating math utilities</a:t>
+            </a:r>
+          </a:p>
+        </p:txBody>
+      </p:sp>
+      <p:sp>
+        <p:nvSpPr>
+          <p:cNvPr id="4" name="TextBox 3"/>
+          <p:cNvSpPr txBox="1"/>
+          <p:nvPr/>
+        </p:nvSpPr>
+        <p:spPr>
+          <a:xfrm>
+            <a:off x="548640" y="6355080"/>
+            <a:ext cx="11064240" cy="320040"/>
+          </a:xfrm>
+          <a:prstGeom prst="rect">
+            <a:avLst/>
+          </a:prstGeom>
+          <a:noFill/>
+        </p:spPr>
+        <p:txBody>
+          <a:bodyPr wrap="square">
+            <a:noAutofit/>
+          </a:bodyPr>
+          <a:lstStyle/>
+          <a:p>
+            <a:pPr algn="r">
+              <a:lnSpc>
+                <a:spcPts val="2200"/>
+              </a:lnSpc>
+              <a:defRPr sz="1000" b="0">
+                <a:solidFill>
+                  <a:srgbClr val="666666"/>
+                </a:solidFill>
+                <a:latin typeface="Calibri"/>
+              </a:defRPr>
+            </a:pPr>
+            <a:r>
+              <a:t>learn_uvm2017_sv_verilator / Module 8</a:t>
+            </a:r>
+          </a:p>
+        </p:txBody>
+      </p:sp>
+    </p:spTree>
+  </p:cSld>
+  <p:clrMapOvr>
+    <a:masterClrMapping/>
+  </p:clrMapOvr>
+</p:sld>
+</file>
+
+<file path=ppt/slides/slide99.xml><?xml version="1.0" encoding="utf-8"?>
+<p:sld xmlns:a="http://schemas.openxmlformats.org/drawingml/2006/main" xmlns:p="http://schemas.openxmlformats.org/presentationml/2006/main" xmlns:r="http://schemas.openxmlformats.org/officeDocument/2006/relationships">
+  <p:cSld>
+    <p:spTree>
+      <p:nvGrpSpPr>
+        <p:cNvPr id="1" name=""/>
+        <p:cNvGrpSpPr/>
+        <p:nvPr/>
+      </p:nvGrpSpPr>
+      <p:grpSpPr/>
+      <p:sp>
+        <p:nvSpPr>
+          <p:cNvPr id="2" name="TextBox 1"/>
+          <p:cNvSpPr txBox="1"/>
+          <p:nvPr/>
+        </p:nvSpPr>
+        <p:spPr>
+          <a:xfrm>
+            <a:off x="548640" y="411480"/>
+            <a:ext cx="11064240" cy="777240"/>
+          </a:xfrm>
+          <a:prstGeom prst="rect">
+            <a:avLst/>
+          </a:prstGeom>
+          <a:noFill/>
+        </p:spPr>
+        <p:txBody>
+          <a:bodyPr wrap="square">
+            <a:noAutofit/>
+          </a:bodyPr>
+          <a:lstStyle/>
+          <a:p>
+            <a:pPr>
+              <a:lnSpc>
+                <a:spcPts val="2200"/>
+              </a:lnSpc>
+              <a:defRPr sz="2800" b="1">
+                <a:solidFill>
+                  <a:srgbClr val="1A1A2E"/>
+                </a:solidFill>
+                <a:latin typeface="Calibri"/>
+              </a:defRPr>
+            </a:pPr>
+            <a:r>
+              <a:t>Demo: Math Utilities</a:t>
+            </a:r>
+          </a:p>
+        </p:txBody>
+      </p:sp>
+      <p:sp>
+        <p:nvSpPr>
+          <p:cNvPr id="3" name="TextBox 2"/>
+          <p:cNvSpPr txBox="1"/>
+          <p:nvPr/>
+        </p:nvSpPr>
+        <p:spPr>
+          <a:xfrm>
+            <a:off x="548640" y="1051560"/>
+            <a:ext cx="11064240" cy="914400"/>
+          </a:xfrm>
+          <a:prstGeom prst="rect">
+            <a:avLst/>
+          </a:prstGeom>
+          <a:solidFill>
+            <a:srgbClr val="F4F4F4"/>
+          </a:solidFill>
+        </p:spPr>
+        <p:txBody>
+          <a:bodyPr wrap="square">
+            <a:noAutofit/>
+          </a:bodyPr>
+          <a:lstStyle/>
+          <a:p>
+            <a:pPr>
+              <a:lnSpc>
+                <a:spcPts val="2200"/>
+              </a:lnSpc>
+              <a:spcAft>
+                <a:spcPts val="200"/>
+              </a:spcAft>
+              <a:defRPr sz="2000" b="0">
+                <a:solidFill>
+                  <a:srgbClr val="333333"/>
+                </a:solidFill>
+                <a:latin typeface="Consolas"/>
+              </a:defRPr>
+            </a:pPr>
+            <a:r>
+              <a:t>$ ./scripts/module8.sh --math-utils</a:t>
+            </a:r>
+          </a:p>
+        </p:txBody>
+      </p:sp>
+      <p:pic>
+        <p:nvPicPr>
+          <p:cNvPr id="4" name="Picture 3" descr="ex07_math_utils.png"/>
+          <p:cNvPicPr>
+            <a:picLocks noChangeAspect="1"/>
+          </p:cNvPicPr>
+          <p:nvPr/>
+        </p:nvPicPr>
+        <p:blipFill>
+          <a:blip r:embed="rId2"/>
+          <a:stretch>
+            <a:fillRect/>
+          </a:stretch>
+        </p:blipFill>
+        <p:spPr>
+          <a:xfrm>
+            <a:off x="548640" y="1965960"/>
+            <a:ext cx="7071358" cy="3977639"/>
+          </a:xfrm>
+          <a:prstGeom prst="rect">
+            <a:avLst/>
+          </a:prstGeom>
+        </p:spPr>
+      </p:pic>
+      <p:sp>
+        <p:nvSpPr>
+          <p:cNvPr id="5" name="TextBox 4"/>
           <p:cNvSpPr txBox="1"/>
           <p:nvPr/>
         </p:nvSpPr>
